--- a/Documents/CS_723_Mang_Khong_Day_Nang_Cao.pptx
+++ b/Documents/CS_723_Mang_Khong_Day_Nang_Cao.pptx
@@ -123,7 +123,7 @@
   </p:defaultTextStyle>
   <p:extLst>
     <p:ext uri="{EFAFB233-063F-42B5-8137-9DF3F51BA10A}">
-      <p15:sldGuideLst xmlns:p15="http://schemas.microsoft.com/office/powerpoint/2012/main" xmlns=""/>
+      <p15:sldGuideLst xmlns="" xmlns:p15="http://schemas.microsoft.com/office/powerpoint/2012/main"/>
     </p:ext>
   </p:extLst>
 </p:presentation>
@@ -168,14 +168,6 @@
             </a:solidFill>
             <a:effectLst/>
           </c:spPr>
-          <c:dPt>
-            <c:idx val="0"/>
-            <c:extLst xmlns:c16r2="http://schemas.microsoft.com/office/drawing/2015/06/chart">
-              <c:ext xmlns:c16="http://schemas.microsoft.com/office/drawing/2014/chart" uri="{C3380CC4-5D6E-409C-BE32-E72D297353CC}">
-                <c16:uniqueId val="{00000001-CF99-4749-B5FF-9F631B7EC850}"/>
-              </c:ext>
-            </c:extLst>
-          </c:dPt>
           <c:dPt>
             <c:idx val="1"/>
             <c:spPr>
@@ -279,11 +271,11 @@
         <c:dLbls>
           <c:showVal val="1"/>
         </c:dLbls>
-        <c:axId val="170638720"/>
-        <c:axId val="172328064"/>
+        <c:axId val="164982784"/>
+        <c:axId val="164984320"/>
       </c:barChart>
       <c:catAx>
-        <c:axId val="170638720"/>
+        <c:axId val="164982784"/>
         <c:scaling>
           <c:orientation val="minMax"/>
         </c:scaling>
@@ -314,7 +306,7 @@
             <a:endParaRPr lang="en-US"/>
           </a:p>
         </c:txPr>
-        <c:crossAx val="172328064"/>
+        <c:crossAx val="164984320"/>
         <c:crosses val="autoZero"/>
         <c:auto val="1"/>
         <c:lblAlgn val="ctr"/>
@@ -322,7 +314,7 @@
         <c:noMultiLvlLbl val="1"/>
       </c:catAx>
       <c:valAx>
-        <c:axId val="172328064"/>
+        <c:axId val="164984320"/>
         <c:scaling>
           <c:orientation val="minMax"/>
         </c:scaling>
@@ -364,7 +356,7 @@
             <a:endParaRPr lang="en-US"/>
           </a:p>
         </c:txPr>
-        <c:crossAx val="170638720"/>
+        <c:crossAx val="164982784"/>
         <c:crosses val="autoZero"/>
         <c:crossBetween val="between"/>
       </c:valAx>
@@ -644,7 +636,7 @@
     </p:spTree>
     <p:extLst>
       <p:ext uri="{BB962C8B-B14F-4D97-AF65-F5344CB8AC3E}">
-        <p14:creationId xmlns:p14="http://schemas.microsoft.com/office/powerpoint/2010/main" xmlns="" val="186005870"/>
+        <p14:creationId xmlns="" xmlns:p14="http://schemas.microsoft.com/office/powerpoint/2010/main" val="186005870"/>
       </p:ext>
     </p:extLst>
   </p:cSld>
@@ -819,7 +811,7 @@
     </p:spTree>
     <p:extLst>
       <p:ext uri="{BB962C8B-B14F-4D97-AF65-F5344CB8AC3E}">
-        <p14:creationId xmlns:p14="http://schemas.microsoft.com/office/powerpoint/2010/main" xmlns="" val="1024086991"/>
+        <p14:creationId xmlns="" xmlns:p14="http://schemas.microsoft.com/office/powerpoint/2010/main" val="1024086991"/>
       </p:ext>
     </p:extLst>
   </p:cSld>
@@ -904,7 +896,7 @@
     </p:spTree>
     <p:extLst>
       <p:ext uri="{BB962C8B-B14F-4D97-AF65-F5344CB8AC3E}">
-        <p14:creationId xmlns:p14="http://schemas.microsoft.com/office/powerpoint/2010/main" xmlns="" val="1024086991"/>
+        <p14:creationId xmlns="" xmlns:p14="http://schemas.microsoft.com/office/powerpoint/2010/main" val="1024086991"/>
       </p:ext>
     </p:extLst>
   </p:cSld>
@@ -989,7 +981,7 @@
     </p:spTree>
     <p:extLst>
       <p:ext uri="{BB962C8B-B14F-4D97-AF65-F5344CB8AC3E}">
-        <p14:creationId xmlns:p14="http://schemas.microsoft.com/office/powerpoint/2010/main" xmlns="" val="1024086991"/>
+        <p14:creationId xmlns="" xmlns:p14="http://schemas.microsoft.com/office/powerpoint/2010/main" val="1024086991"/>
       </p:ext>
     </p:extLst>
   </p:cSld>
@@ -1074,7 +1066,7 @@
     </p:spTree>
     <p:extLst>
       <p:ext uri="{BB962C8B-B14F-4D97-AF65-F5344CB8AC3E}">
-        <p14:creationId xmlns:p14="http://schemas.microsoft.com/office/powerpoint/2010/main" xmlns="" val="1024086991"/>
+        <p14:creationId xmlns="" xmlns:p14="http://schemas.microsoft.com/office/powerpoint/2010/main" val="1024086991"/>
       </p:ext>
     </p:extLst>
   </p:cSld>
@@ -1159,7 +1151,7 @@
     </p:spTree>
     <p:extLst>
       <p:ext uri="{BB962C8B-B14F-4D97-AF65-F5344CB8AC3E}">
-        <p14:creationId xmlns:p14="http://schemas.microsoft.com/office/powerpoint/2010/main" xmlns="" val="1024086991"/>
+        <p14:creationId xmlns="" xmlns:p14="http://schemas.microsoft.com/office/powerpoint/2010/main" val="1024086991"/>
       </p:ext>
     </p:extLst>
   </p:cSld>
@@ -1244,7 +1236,7 @@
     </p:spTree>
     <p:extLst>
       <p:ext uri="{BB962C8B-B14F-4D97-AF65-F5344CB8AC3E}">
-        <p14:creationId xmlns:p14="http://schemas.microsoft.com/office/powerpoint/2010/main" xmlns="" val="1024086991"/>
+        <p14:creationId xmlns="" xmlns:p14="http://schemas.microsoft.com/office/powerpoint/2010/main" val="1024086991"/>
       </p:ext>
     </p:extLst>
   </p:cSld>
@@ -1329,7 +1321,7 @@
     </p:spTree>
     <p:extLst>
       <p:ext uri="{BB962C8B-B14F-4D97-AF65-F5344CB8AC3E}">
-        <p14:creationId xmlns:p14="http://schemas.microsoft.com/office/powerpoint/2010/main" xmlns="" val="1024086991"/>
+        <p14:creationId xmlns="" xmlns:p14="http://schemas.microsoft.com/office/powerpoint/2010/main" val="1024086991"/>
       </p:ext>
     </p:extLst>
   </p:cSld>
@@ -1414,7 +1406,7 @@
     </p:spTree>
     <p:extLst>
       <p:ext uri="{BB962C8B-B14F-4D97-AF65-F5344CB8AC3E}">
-        <p14:creationId xmlns:p14="http://schemas.microsoft.com/office/powerpoint/2010/main" xmlns="" val="1024086991"/>
+        <p14:creationId xmlns="" xmlns:p14="http://schemas.microsoft.com/office/powerpoint/2010/main" val="1024086991"/>
       </p:ext>
     </p:extLst>
   </p:cSld>
@@ -1499,7 +1491,7 @@
     </p:spTree>
     <p:extLst>
       <p:ext uri="{BB962C8B-B14F-4D97-AF65-F5344CB8AC3E}">
-        <p14:creationId xmlns:p14="http://schemas.microsoft.com/office/powerpoint/2010/main" xmlns="" val="1024086991"/>
+        <p14:creationId xmlns="" xmlns:p14="http://schemas.microsoft.com/office/powerpoint/2010/main" val="1024086991"/>
       </p:ext>
     </p:extLst>
   </p:cSld>
@@ -1584,7 +1576,7 @@
     </p:spTree>
     <p:extLst>
       <p:ext uri="{BB962C8B-B14F-4D97-AF65-F5344CB8AC3E}">
-        <p14:creationId xmlns:p14="http://schemas.microsoft.com/office/powerpoint/2010/main" xmlns="" val="1024086991"/>
+        <p14:creationId xmlns="" xmlns:p14="http://schemas.microsoft.com/office/powerpoint/2010/main" val="1024086991"/>
       </p:ext>
     </p:extLst>
   </p:cSld>
@@ -1669,7 +1661,7 @@
     </p:spTree>
     <p:extLst>
       <p:ext uri="{BB962C8B-B14F-4D97-AF65-F5344CB8AC3E}">
-        <p14:creationId xmlns:p14="http://schemas.microsoft.com/office/powerpoint/2010/main" xmlns="" val="1024086991"/>
+        <p14:creationId xmlns="" xmlns:p14="http://schemas.microsoft.com/office/powerpoint/2010/main" val="1024086991"/>
       </p:ext>
     </p:extLst>
   </p:cSld>
@@ -1754,7 +1746,7 @@
     </p:spTree>
     <p:extLst>
       <p:ext uri="{BB962C8B-B14F-4D97-AF65-F5344CB8AC3E}">
-        <p14:creationId xmlns:p14="http://schemas.microsoft.com/office/powerpoint/2010/main" xmlns="" val="1024086991"/>
+        <p14:creationId xmlns="" xmlns:p14="http://schemas.microsoft.com/office/powerpoint/2010/main" val="1024086991"/>
       </p:ext>
     </p:extLst>
   </p:cSld>
@@ -1839,7 +1831,7 @@
     </p:spTree>
     <p:extLst>
       <p:ext uri="{BB962C8B-B14F-4D97-AF65-F5344CB8AC3E}">
-        <p14:creationId xmlns:p14="http://schemas.microsoft.com/office/powerpoint/2010/main" xmlns="" val="1024086991"/>
+        <p14:creationId xmlns="" xmlns:p14="http://schemas.microsoft.com/office/powerpoint/2010/main" val="1024086991"/>
       </p:ext>
     </p:extLst>
   </p:cSld>
@@ -1924,7 +1916,7 @@
     </p:spTree>
     <p:extLst>
       <p:ext uri="{BB962C8B-B14F-4D97-AF65-F5344CB8AC3E}">
-        <p14:creationId xmlns:p14="http://schemas.microsoft.com/office/powerpoint/2010/main" xmlns="" val="1024086991"/>
+        <p14:creationId xmlns="" xmlns:p14="http://schemas.microsoft.com/office/powerpoint/2010/main" val="1024086991"/>
       </p:ext>
     </p:extLst>
   </p:cSld>
@@ -2009,7 +2001,7 @@
     </p:spTree>
     <p:extLst>
       <p:ext uri="{BB962C8B-B14F-4D97-AF65-F5344CB8AC3E}">
-        <p14:creationId xmlns:p14="http://schemas.microsoft.com/office/powerpoint/2010/main" xmlns="" val="1024086991"/>
+        <p14:creationId xmlns="" xmlns:p14="http://schemas.microsoft.com/office/powerpoint/2010/main" val="1024086991"/>
       </p:ext>
     </p:extLst>
   </p:cSld>
@@ -2094,7 +2086,7 @@
     </p:spTree>
     <p:extLst>
       <p:ext uri="{BB962C8B-B14F-4D97-AF65-F5344CB8AC3E}">
-        <p14:creationId xmlns:p14="http://schemas.microsoft.com/office/powerpoint/2010/main" xmlns="" val="1024086991"/>
+        <p14:creationId xmlns="" xmlns:p14="http://schemas.microsoft.com/office/powerpoint/2010/main" val="1024086991"/>
       </p:ext>
     </p:extLst>
   </p:cSld>
@@ -2179,7 +2171,7 @@
     </p:spTree>
     <p:extLst>
       <p:ext uri="{BB962C8B-B14F-4D97-AF65-F5344CB8AC3E}">
-        <p14:creationId xmlns:p14="http://schemas.microsoft.com/office/powerpoint/2010/main" xmlns="" val="1024086991"/>
+        <p14:creationId xmlns="" xmlns:p14="http://schemas.microsoft.com/office/powerpoint/2010/main" val="1024086991"/>
       </p:ext>
     </p:extLst>
   </p:cSld>
@@ -2264,7 +2256,7 @@
     </p:spTree>
     <p:extLst>
       <p:ext uri="{BB962C8B-B14F-4D97-AF65-F5344CB8AC3E}">
-        <p14:creationId xmlns:p14="http://schemas.microsoft.com/office/powerpoint/2010/main" xmlns="" val="1024086991"/>
+        <p14:creationId xmlns="" xmlns:p14="http://schemas.microsoft.com/office/powerpoint/2010/main" val="1024086991"/>
       </p:ext>
     </p:extLst>
   </p:cSld>
@@ -5240,7 +5232,7 @@
           <p:nvPr>
             <p:extLst>
               <p:ext uri="{D42A27DB-BD31-4B8C-83A1-F6EECF244321}">
-                <p14:modId xmlns:p14="http://schemas.microsoft.com/office/powerpoint/2010/main" xmlns="" val="1579011935"/>
+                <p14:modId xmlns="" xmlns:p14="http://schemas.microsoft.com/office/powerpoint/2010/main" val="1579011935"/>
               </p:ext>
             </p:extLst>
           </p:nvPr>
@@ -5257,28 +5249,28 @@
                 <a:gridCol w="1097280">
                   <a:extLst>
                     <a:ext uri="{9D8B030D-6E8A-4147-A177-3AD203B41FA5}">
-                      <a16:colId xmlns:a16="http://schemas.microsoft.com/office/drawing/2014/main" xmlns="" val="20000"/>
+                      <a16:colId xmlns="" xmlns:a16="http://schemas.microsoft.com/office/drawing/2014/main" val="20000"/>
                     </a:ext>
                   </a:extLst>
                 </a:gridCol>
                 <a:gridCol w="2258568">
                   <a:extLst>
                     <a:ext uri="{9D8B030D-6E8A-4147-A177-3AD203B41FA5}">
-                      <a16:colId xmlns:a16="http://schemas.microsoft.com/office/drawing/2014/main" xmlns="" val="20001"/>
+                      <a16:colId xmlns="" xmlns:a16="http://schemas.microsoft.com/office/drawing/2014/main" val="20001"/>
                     </a:ext>
                   </a:extLst>
                 </a:gridCol>
                 <a:gridCol w="2258568">
                   <a:extLst>
                     <a:ext uri="{9D8B030D-6E8A-4147-A177-3AD203B41FA5}">
-                      <a16:colId xmlns:a16="http://schemas.microsoft.com/office/drawing/2014/main" xmlns="" val="20002"/>
+                      <a16:colId xmlns="" xmlns:a16="http://schemas.microsoft.com/office/drawing/2014/main" val="20002"/>
                     </a:ext>
                   </a:extLst>
                 </a:gridCol>
                 <a:gridCol w="2258568">
                   <a:extLst>
                     <a:ext uri="{9D8B030D-6E8A-4147-A177-3AD203B41FA5}">
-                      <a16:colId xmlns:a16="http://schemas.microsoft.com/office/drawing/2014/main" xmlns="" val="20003"/>
+                      <a16:colId xmlns="" xmlns:a16="http://schemas.microsoft.com/office/drawing/2014/main" val="20003"/>
                     </a:ext>
                   </a:extLst>
                 </a:gridCol>
@@ -5558,7 +5550,7 @@
                 </a:tc>
                 <a:extLst>
                   <a:ext uri="{0D108BD9-81ED-4DB2-BD59-A6C34878D82A}">
-                    <a16:rowId xmlns:a16="http://schemas.microsoft.com/office/drawing/2014/main" xmlns="" val="10000"/>
+                    <a16:rowId xmlns="" xmlns:a16="http://schemas.microsoft.com/office/drawing/2014/main" val="10000"/>
                   </a:ext>
                 </a:extLst>
               </a:tr>
@@ -5837,7 +5829,7 @@
                 </a:tc>
                 <a:extLst>
                   <a:ext uri="{0D108BD9-81ED-4DB2-BD59-A6C34878D82A}">
-                    <a16:rowId xmlns:a16="http://schemas.microsoft.com/office/drawing/2014/main" xmlns="" val="10001"/>
+                    <a16:rowId xmlns="" xmlns:a16="http://schemas.microsoft.com/office/drawing/2014/main" val="10001"/>
                   </a:ext>
                 </a:extLst>
               </a:tr>
@@ -6116,7 +6108,7 @@
                 </a:tc>
                 <a:extLst>
                   <a:ext uri="{0D108BD9-81ED-4DB2-BD59-A6C34878D82A}">
-                    <a16:rowId xmlns:a16="http://schemas.microsoft.com/office/drawing/2014/main" xmlns="" val="10002"/>
+                    <a16:rowId xmlns="" xmlns:a16="http://schemas.microsoft.com/office/drawing/2014/main" val="10002"/>
                   </a:ext>
                 </a:extLst>
               </a:tr>
@@ -6395,7 +6387,7 @@
                 </a:tc>
                 <a:extLst>
                   <a:ext uri="{0D108BD9-81ED-4DB2-BD59-A6C34878D82A}">
-                    <a16:rowId xmlns:a16="http://schemas.microsoft.com/office/drawing/2014/main" xmlns="" val="10003"/>
+                    <a16:rowId xmlns="" xmlns:a16="http://schemas.microsoft.com/office/drawing/2014/main" val="10003"/>
                   </a:ext>
                 </a:extLst>
               </a:tr>
@@ -6674,7 +6666,7 @@
                 </a:tc>
                 <a:extLst>
                   <a:ext uri="{0D108BD9-81ED-4DB2-BD59-A6C34878D82A}">
-                    <a16:rowId xmlns:a16="http://schemas.microsoft.com/office/drawing/2014/main" xmlns="" val="10004"/>
+                    <a16:rowId xmlns="" xmlns:a16="http://schemas.microsoft.com/office/drawing/2014/main" val="10004"/>
                   </a:ext>
                 </a:extLst>
               </a:tr>
@@ -6953,7 +6945,7 @@
                 </a:tc>
                 <a:extLst>
                   <a:ext uri="{0D108BD9-81ED-4DB2-BD59-A6C34878D82A}">
-                    <a16:rowId xmlns:a16="http://schemas.microsoft.com/office/drawing/2014/main" xmlns="" val="10005"/>
+                    <a16:rowId xmlns="" xmlns:a16="http://schemas.microsoft.com/office/drawing/2014/main" val="10005"/>
                   </a:ext>
                 </a:extLst>
               </a:tr>
@@ -7232,7 +7224,7 @@
                 </a:tc>
                 <a:extLst>
                   <a:ext uri="{0D108BD9-81ED-4DB2-BD59-A6C34878D82A}">
-                    <a16:rowId xmlns:a16="http://schemas.microsoft.com/office/drawing/2014/main" xmlns="" val="10006"/>
+                    <a16:rowId xmlns="" xmlns:a16="http://schemas.microsoft.com/office/drawing/2014/main" val="10006"/>
                   </a:ext>
                 </a:extLst>
               </a:tr>
@@ -7511,7 +7503,7 @@
                 </a:tc>
                 <a:extLst>
                   <a:ext uri="{0D108BD9-81ED-4DB2-BD59-A6C34878D82A}">
-                    <a16:rowId xmlns:a16="http://schemas.microsoft.com/office/drawing/2014/main" xmlns="" val="10007"/>
+                    <a16:rowId xmlns="" xmlns:a16="http://schemas.microsoft.com/office/drawing/2014/main" val="10007"/>
                   </a:ext>
                 </a:extLst>
               </a:tr>
@@ -7790,7 +7782,7 @@
                 </a:tc>
                 <a:extLst>
                   <a:ext uri="{0D108BD9-81ED-4DB2-BD59-A6C34878D82A}">
-                    <a16:rowId xmlns:a16="http://schemas.microsoft.com/office/drawing/2014/main" xmlns="" val="10008"/>
+                    <a16:rowId xmlns="" xmlns:a16="http://schemas.microsoft.com/office/drawing/2014/main" val="10008"/>
                   </a:ext>
                 </a:extLst>
               </a:tr>
@@ -8069,7 +8061,7 @@
                 </a:tc>
                 <a:extLst>
                   <a:ext uri="{0D108BD9-81ED-4DB2-BD59-A6C34878D82A}">
-                    <a16:rowId xmlns:a16="http://schemas.microsoft.com/office/drawing/2014/main" xmlns="" val="10009"/>
+                    <a16:rowId xmlns="" xmlns:a16="http://schemas.microsoft.com/office/drawing/2014/main" val="10009"/>
                   </a:ext>
                 </a:extLst>
               </a:tr>
@@ -8348,7 +8340,7 @@
                 </a:tc>
                 <a:extLst>
                   <a:ext uri="{0D108BD9-81ED-4DB2-BD59-A6C34878D82A}">
-                    <a16:rowId xmlns:a16="http://schemas.microsoft.com/office/drawing/2014/main" xmlns="" val="10010"/>
+                    <a16:rowId xmlns="" xmlns:a16="http://schemas.microsoft.com/office/drawing/2014/main" val="10010"/>
                   </a:ext>
                 </a:extLst>
               </a:tr>
@@ -10054,7 +10046,29 @@
                 <a:ea typeface="Trebuchet MS" pitchFamily="34" charset="-122"/>
                 <a:cs typeface="Times New Roman"/>
               </a:rPr>
-              <a:t>CẢM ƠN THẦY VÀ CÁC ANH CHỊ</a:t>
+              <a:t>CẢM ƠN THẦY </a:t>
+            </a:r>
+            <a:r>
+              <a:rPr lang="en-US" sz="3600" b="1" smtClean="0">
+                <a:solidFill>
+                  <a:srgbClr val="FFFFFF"/>
+                </a:solidFill>
+                <a:latin typeface="Times New Roman"/>
+                <a:ea typeface="Trebuchet MS" pitchFamily="34" charset="-122"/>
+                <a:cs typeface="Times New Roman"/>
+              </a:rPr>
+              <a:t>VÀ </a:t>
+            </a:r>
+            <a:r>
+              <a:rPr lang="en-US" sz="3600" b="1">
+                <a:solidFill>
+                  <a:srgbClr val="FFFFFF"/>
+                </a:solidFill>
+                <a:latin typeface="Times New Roman"/>
+                <a:ea typeface="Trebuchet MS" pitchFamily="34" charset="-122"/>
+                <a:cs typeface="Times New Roman"/>
+              </a:rPr>
+              <a:t>ANH CHỊ</a:t>
             </a:r>
             <a:endParaRPr lang="en-US" sz="3600">
               <a:latin typeface="Times New Roman"/>
@@ -12094,6 +12108,13 @@
   <p:clrMapOvr>
     <a:masterClrMapping/>
   </p:clrMapOvr>
+  <p:timing>
+    <p:tnLst>
+      <p:par>
+        <p:cTn id="1" dur="indefinite" restart="never" nodeType="tmRoot"/>
+      </p:par>
+    </p:tnLst>
+  </p:timing>
 </p:sld>
 </file>
 
@@ -12720,6 +12741,13 @@
   <p:clrMapOvr>
     <a:masterClrMapping/>
   </p:clrMapOvr>
+  <p:timing>
+    <p:tnLst>
+      <p:par>
+        <p:cTn id="1" dur="indefinite" restart="never" nodeType="tmRoot"/>
+      </p:par>
+    </p:tnLst>
+  </p:timing>
 </p:sld>
 </file>
 
@@ -12907,6 +12935,13 @@
   <p:clrMapOvr>
     <a:masterClrMapping/>
   </p:clrMapOvr>
+  <p:timing>
+    <p:tnLst>
+      <p:par>
+        <p:cTn id="1" dur="indefinite" restart="never" nodeType="tmRoot"/>
+      </p:par>
+    </p:tnLst>
+  </p:timing>
 </p:sld>
 </file>
 
@@ -13741,6 +13776,13 @@
   <p:clrMapOvr>
     <a:masterClrMapping/>
   </p:clrMapOvr>
+  <p:timing>
+    <p:tnLst>
+      <p:par>
+        <p:cTn id="1" dur="indefinite" restart="never" nodeType="tmRoot"/>
+      </p:par>
+    </p:tnLst>
+  </p:timing>
 </p:sld>
 </file>
 
@@ -13839,7 +13881,7 @@
         </p:nvSpPr>
         <p:spPr>
           <a:xfrm>
-            <a:off x="640080" y="914400"/>
+            <a:off x="566928" y="896112"/>
             <a:ext cx="7863840" cy="822960"/>
           </a:xfrm>
           <a:prstGeom prst="rect">
@@ -13958,21 +14000,140 @@
           <a:bodyPr wrap="square" lIns="0" tIns="0" rIns="0" bIns="0" rtlCol="0" anchor="ctr"/>
           <a:lstStyle/>
           <a:p>
+            <a:r>
+              <a:rPr lang="en-US" sz="1200" b="1" dirty="0" smtClean="0">
+                <a:solidFill>
+                  <a:srgbClr val="00B0F0"/>
+                </a:solidFill>
+              </a:rPr>
+              <a:t>d</a:t>
+            </a:r>
+            <a:r>
+              <a:rPr lang="en-US" sz="1200" b="1" baseline="-25000" dirty="0" smtClean="0">
+                <a:solidFill>
+                  <a:srgbClr val="00B0F0"/>
+                </a:solidFill>
+              </a:rPr>
+              <a:t>u</a:t>
+            </a:r>
+            <a:r>
+              <a:rPr lang="en-US" sz="1200" b="1" dirty="0" smtClean="0">
+                <a:solidFill>
+                  <a:srgbClr val="00B0F0"/>
+                </a:solidFill>
+              </a:rPr>
+              <a:t> = √((x - </a:t>
+            </a:r>
+            <a:r>
+              <a:rPr lang="en-US" sz="1200" b="1" dirty="0" err="1" smtClean="0">
+                <a:solidFill>
+                  <a:srgbClr val="00B0F0"/>
+                </a:solidFill>
+              </a:rPr>
+              <a:t>x</a:t>
+            </a:r>
+            <a:r>
+              <a:rPr lang="en-US" sz="1200" b="1" baseline="-25000" dirty="0" err="1" smtClean="0">
+                <a:solidFill>
+                  <a:srgbClr val="00B0F0"/>
+                </a:solidFill>
+              </a:rPr>
+              <a:t>u</a:t>
+            </a:r>
+            <a:r>
+              <a:rPr lang="en-US" sz="1200" b="1" dirty="0" smtClean="0">
+                <a:solidFill>
+                  <a:srgbClr val="00B0F0"/>
+                </a:solidFill>
+              </a:rPr>
+              <a:t>)</a:t>
+            </a:r>
+            <a:r>
+              <a:rPr lang="en-US" sz="1200" b="1" baseline="30000" dirty="0" smtClean="0">
+                <a:solidFill>
+                  <a:srgbClr val="00B0F0"/>
+                </a:solidFill>
+              </a:rPr>
+              <a:t>2</a:t>
+            </a:r>
+            <a:r>
+              <a:rPr lang="en-US" sz="1200" b="1" dirty="0" smtClean="0">
+                <a:solidFill>
+                  <a:srgbClr val="00B0F0"/>
+                </a:solidFill>
+              </a:rPr>
+              <a:t> + (y - </a:t>
+            </a:r>
+            <a:r>
+              <a:rPr lang="en-US" sz="1200" b="1" dirty="0" err="1" smtClean="0">
+                <a:solidFill>
+                  <a:srgbClr val="00B0F0"/>
+                </a:solidFill>
+              </a:rPr>
+              <a:t>y</a:t>
+            </a:r>
+            <a:r>
+              <a:rPr lang="en-US" sz="1200" b="1" baseline="-25000" dirty="0" err="1" smtClean="0">
+                <a:solidFill>
+                  <a:srgbClr val="00B0F0"/>
+                </a:solidFill>
+              </a:rPr>
+              <a:t>u</a:t>
+            </a:r>
+            <a:r>
+              <a:rPr lang="en-US" sz="1200" b="1" dirty="0" smtClean="0">
+                <a:solidFill>
+                  <a:srgbClr val="00B0F0"/>
+                </a:solidFill>
+              </a:rPr>
+              <a:t>)</a:t>
+            </a:r>
+            <a:r>
+              <a:rPr lang="en-US" sz="1200" b="1" baseline="30000" dirty="0" smtClean="0">
+                <a:solidFill>
+                  <a:srgbClr val="00B0F0"/>
+                </a:solidFill>
+              </a:rPr>
+              <a:t>2</a:t>
+            </a:r>
+            <a:r>
+              <a:rPr lang="en-US" sz="1200" b="1" dirty="0" smtClean="0">
+                <a:solidFill>
+                  <a:srgbClr val="00B0F0"/>
+                </a:solidFill>
+              </a:rPr>
+              <a:t> + h</a:t>
+            </a:r>
+            <a:r>
+              <a:rPr lang="en-US" sz="1200" b="1" baseline="30000" dirty="0" smtClean="0">
+                <a:solidFill>
+                  <a:srgbClr val="00B0F0"/>
+                </a:solidFill>
+              </a:rPr>
+              <a:t>2</a:t>
+            </a:r>
+            <a:r>
+              <a:rPr lang="en-US" sz="1200" b="1" dirty="0" smtClean="0">
+                <a:solidFill>
+                  <a:srgbClr val="00B0F0"/>
+                </a:solidFill>
+              </a:rPr>
+              <a:t>)</a:t>
+            </a:r>
+            <a:endParaRPr lang="en-US" sz="1200" dirty="0" smtClean="0">
+              <a:solidFill>
+                <a:srgbClr val="00B0F0"/>
+              </a:solidFill>
+            </a:endParaRPr>
+          </a:p>
+          <a:p>
             <a:pPr marL="0" indent="0">
               <a:buNone/>
             </a:pPr>
-            <a:r>
-              <a:rPr lang="en-US" sz="1200" dirty="0">
-                <a:solidFill>
-                  <a:srgbClr val="00BCD4"/>
-                </a:solidFill>
-                <a:latin typeface="Times New Roman"/>
-                <a:ea typeface="Consolas" pitchFamily="34" charset="-122"/>
-                <a:cs typeface="Times New Roman"/>
-              </a:rPr>
-              <a:t>d_u = √((x−x_u)² + (y−y_u)² + h²)</a:t>
-            </a:r>
             <a:endParaRPr lang="en-US" sz="1200" dirty="0">
+              <a:solidFill>
+                <a:srgbClr val="00B0F0"/>
+              </a:solidFill>
               <a:latin typeface="Times New Roman"/>
               <a:cs typeface="Times New Roman"/>
             </a:endParaRPr>
@@ -14148,23 +14309,82 @@
           <a:bodyPr wrap="square" lIns="0" tIns="0" rIns="0" bIns="0" rtlCol="0" anchor="ctr"/>
           <a:lstStyle/>
           <a:p>
-            <a:pPr marL="0" indent="0">
-              <a:buNone/>
-            </a:pPr>
-            <a:r>
-              <a:rPr lang="en-US" sz="1200" dirty="0">
-                <a:solidFill>
-                  <a:srgbClr val="00BCD4"/>
-                </a:solidFill>
-                <a:latin typeface="Times New Roman"/>
-                <a:ea typeface="Consolas" pitchFamily="34" charset="-122"/>
-                <a:cs typeface="Times New Roman"/>
-              </a:rPr>
-              <a:t>PL_u = PL₀ + 10·α·log₁₀(d_u)</a:t>
+            <a:r>
+              <a:rPr lang="en-US" sz="1200" b="1" dirty="0" err="1" smtClean="0">
+                <a:solidFill>
+                  <a:srgbClr val="00B0F0"/>
+                </a:solidFill>
+              </a:rPr>
+              <a:t>PL</a:t>
+            </a:r>
+            <a:r>
+              <a:rPr lang="en-US" sz="1200" b="1" baseline="-25000" dirty="0" err="1" smtClean="0">
+                <a:solidFill>
+                  <a:srgbClr val="00B0F0"/>
+                </a:solidFill>
+              </a:rPr>
+              <a:t>u</a:t>
+            </a:r>
+            <a:r>
+              <a:rPr lang="en-US" sz="1200" b="1" dirty="0" smtClean="0">
+                <a:solidFill>
+                  <a:srgbClr val="00B0F0"/>
+                </a:solidFill>
+              </a:rPr>
+              <a:t>(d) = PL</a:t>
+            </a:r>
+            <a:r>
+              <a:rPr lang="en-US" sz="1200" b="1" baseline="-25000" dirty="0" smtClean="0">
+                <a:solidFill>
+                  <a:srgbClr val="00B0F0"/>
+                </a:solidFill>
+              </a:rPr>
+              <a:t>0</a:t>
+            </a:r>
+            <a:r>
+              <a:rPr lang="en-US" sz="1200" b="1" dirty="0" smtClean="0">
+                <a:solidFill>
+                  <a:srgbClr val="00B0F0"/>
+                </a:solidFill>
+              </a:rPr>
+              <a:t> + 10 • α • log</a:t>
+            </a:r>
+            <a:r>
+              <a:rPr lang="en-US" sz="1200" b="1" baseline="-25000" dirty="0" smtClean="0">
+                <a:solidFill>
+                  <a:srgbClr val="00B0F0"/>
+                </a:solidFill>
+              </a:rPr>
+              <a:t>10</a:t>
+            </a:r>
+            <a:r>
+              <a:rPr lang="en-US" sz="1200" b="1" dirty="0" smtClean="0">
+                <a:solidFill>
+                  <a:srgbClr val="00B0F0"/>
+                </a:solidFill>
+              </a:rPr>
+              <a:t>(d</a:t>
+            </a:r>
+            <a:r>
+              <a:rPr lang="en-US" sz="1200" b="1" baseline="-25000" dirty="0" smtClean="0">
+                <a:solidFill>
+                  <a:srgbClr val="00B0F0"/>
+                </a:solidFill>
+              </a:rPr>
+              <a:t>u</a:t>
+            </a:r>
+            <a:r>
+              <a:rPr lang="en-US" sz="1200" b="1" dirty="0" smtClean="0">
+                <a:solidFill>
+                  <a:srgbClr val="00B0F0"/>
+                </a:solidFill>
+              </a:rPr>
+              <a:t>)</a:t>
             </a:r>
             <a:endParaRPr lang="en-US" sz="1200" dirty="0">
-              <a:latin typeface="Times New Roman"/>
-              <a:cs typeface="Times New Roman"/>
+              <a:solidFill>
+                <a:srgbClr val="00B0F0"/>
+              </a:solidFill>
             </a:endParaRPr>
           </a:p>
         </p:txBody>
@@ -14338,23 +14558,74 @@
           <a:bodyPr wrap="square" lIns="0" tIns="0" rIns="0" bIns="0" rtlCol="0" anchor="ctr"/>
           <a:lstStyle/>
           <a:p>
-            <a:pPr marL="0" indent="0">
-              <a:buNone/>
-            </a:pPr>
-            <a:r>
-              <a:rPr lang="en-US" sz="1200" dirty="0">
-                <a:solidFill>
-                  <a:srgbClr val="00BCD4"/>
-                </a:solidFill>
-                <a:latin typeface="Times New Roman"/>
-                <a:ea typeface="Consolas" pitchFamily="34" charset="-122"/>
-                <a:cs typeface="Times New Roman"/>
-              </a:rPr>
-              <a:t>γ_u = P_rx,u / σ²</a:t>
+            <a:r>
+              <a:rPr lang="en-US" sz="1200" b="1" dirty="0" err="1" smtClean="0">
+                <a:solidFill>
+                  <a:srgbClr val="00B0F0"/>
+                </a:solidFill>
+              </a:rPr>
+              <a:t>γ</a:t>
+            </a:r>
+            <a:r>
+              <a:rPr lang="en-US" sz="1200" b="1" baseline="-25000" dirty="0" err="1" smtClean="0">
+                <a:solidFill>
+                  <a:srgbClr val="00B0F0"/>
+                </a:solidFill>
+              </a:rPr>
+              <a:t>u</a:t>
+            </a:r>
+            <a:r>
+              <a:rPr lang="en-US" sz="1200" b="1" dirty="0" smtClean="0">
+                <a:solidFill>
+                  <a:srgbClr val="00B0F0"/>
+                </a:solidFill>
+              </a:rPr>
+              <a:t> = </a:t>
+            </a:r>
+            <a:r>
+              <a:rPr lang="en-US" sz="1200" b="1" dirty="0" err="1" smtClean="0">
+                <a:solidFill>
+                  <a:srgbClr val="00B0F0"/>
+                </a:solidFill>
+              </a:rPr>
+              <a:t>P</a:t>
+            </a:r>
+            <a:r>
+              <a:rPr lang="en-US" sz="1200" b="1" baseline="-25000" dirty="0" err="1" smtClean="0">
+                <a:solidFill>
+                  <a:srgbClr val="00B0F0"/>
+                </a:solidFill>
+              </a:rPr>
+              <a:t>rx</a:t>
+            </a:r>
+            <a:r>
+              <a:rPr lang="en-US" sz="1200" b="1" baseline="-25000" dirty="0" smtClean="0">
+                <a:solidFill>
+                  <a:srgbClr val="00B0F0"/>
+                </a:solidFill>
+              </a:rPr>
+              <a:t>, u</a:t>
+            </a:r>
+            <a:r>
+              <a:rPr lang="en-US" sz="1200" b="1" dirty="0" smtClean="0">
+                <a:solidFill>
+                  <a:srgbClr val="00B0F0"/>
+                </a:solidFill>
+              </a:rPr>
+              <a:t> / σ</a:t>
+            </a:r>
+            <a:r>
+              <a:rPr lang="en-US" sz="1200" b="1" baseline="30000" dirty="0" smtClean="0">
+                <a:solidFill>
+                  <a:srgbClr val="00B0F0"/>
+                </a:solidFill>
+              </a:rPr>
+              <a:t>2</a:t>
             </a:r>
             <a:endParaRPr lang="en-US" sz="1200" dirty="0">
-              <a:latin typeface="Times New Roman"/>
-              <a:cs typeface="Times New Roman"/>
+              <a:solidFill>
+                <a:srgbClr val="00B0F0"/>
+              </a:solidFill>
             </a:endParaRPr>
           </a:p>
         </p:txBody>
@@ -14528,23 +14799,74 @@
           <a:bodyPr wrap="square" lIns="0" tIns="0" rIns="0" bIns="0" rtlCol="0" anchor="ctr"/>
           <a:lstStyle/>
           <a:p>
-            <a:pPr marL="0" indent="0">
-              <a:buNone/>
-            </a:pPr>
-            <a:r>
-              <a:rPr lang="en-US" sz="1200" dirty="0">
-                <a:solidFill>
-                  <a:srgbClr val="00BCD4"/>
-                </a:solidFill>
-                <a:latin typeface="Times New Roman"/>
-                <a:ea typeface="Consolas" pitchFamily="34" charset="-122"/>
-                <a:cs typeface="Times New Roman"/>
-              </a:rPr>
-              <a:t>C_u = B · log₂(1 + γ_u)</a:t>
+            <a:r>
+              <a:rPr lang="en-US" sz="1200" b="1" dirty="0" smtClean="0">
+                <a:solidFill>
+                  <a:srgbClr val="00B0F0"/>
+                </a:solidFill>
+              </a:rPr>
+              <a:t>C</a:t>
+            </a:r>
+            <a:r>
+              <a:rPr lang="en-US" sz="1200" b="1" baseline="-25000" dirty="0" smtClean="0">
+                <a:solidFill>
+                  <a:srgbClr val="00B0F0"/>
+                </a:solidFill>
+              </a:rPr>
+              <a:t>u</a:t>
+            </a:r>
+            <a:r>
+              <a:rPr lang="en-US" sz="1200" b="1" dirty="0" smtClean="0">
+                <a:solidFill>
+                  <a:srgbClr val="00B0F0"/>
+                </a:solidFill>
+              </a:rPr>
+              <a:t> = B • log</a:t>
+            </a:r>
+            <a:r>
+              <a:rPr lang="en-US" sz="1200" b="1" baseline="-25000" dirty="0" smtClean="0">
+                <a:solidFill>
+                  <a:srgbClr val="00B0F0"/>
+                </a:solidFill>
+              </a:rPr>
+              <a:t>2</a:t>
+            </a:r>
+            <a:r>
+              <a:rPr lang="en-US" sz="1200" b="1" dirty="0" smtClean="0">
+                <a:solidFill>
+                  <a:srgbClr val="00B0F0"/>
+                </a:solidFill>
+              </a:rPr>
+              <a:t>(1 + </a:t>
+            </a:r>
+            <a:r>
+              <a:rPr lang="en-US" sz="1200" b="1" dirty="0" err="1" smtClean="0">
+                <a:solidFill>
+                  <a:srgbClr val="00B0F0"/>
+                </a:solidFill>
+              </a:rPr>
+              <a:t>γ</a:t>
+            </a:r>
+            <a:r>
+              <a:rPr lang="en-US" sz="1200" b="1" baseline="-25000" dirty="0" err="1" smtClean="0">
+                <a:solidFill>
+                  <a:srgbClr val="00B0F0"/>
+                </a:solidFill>
+              </a:rPr>
+              <a:t>u</a:t>
+            </a:r>
+            <a:r>
+              <a:rPr lang="en-US" sz="1200" b="1" dirty="0" smtClean="0">
+                <a:solidFill>
+                  <a:srgbClr val="00B0F0"/>
+                </a:solidFill>
+              </a:rPr>
+              <a:t>)</a:t>
             </a:r>
             <a:endParaRPr lang="en-US" sz="1200" dirty="0">
-              <a:latin typeface="Times New Roman"/>
-              <a:cs typeface="Times New Roman"/>
+              <a:solidFill>
+                <a:srgbClr val="00B0F0"/>
+              </a:solidFill>
             </a:endParaRPr>
           </a:p>
         </p:txBody>
@@ -14596,6 +14918,13 @@
   <p:clrMapOvr>
     <a:masterClrMapping/>
   </p:clrMapOvr>
+  <p:timing>
+    <p:tnLst>
+      <p:par>
+        <p:cTn id="1" dur="indefinite" restart="never" nodeType="tmRoot"/>
+      </p:par>
+    </p:tnLst>
+  </p:timing>
 </p:sld>
 </file>
 
@@ -14972,6 +15301,13 @@
   <p:clrMapOvr>
     <a:masterClrMapping/>
   </p:clrMapOvr>
+  <p:timing>
+    <p:tnLst>
+      <p:par>
+        <p:cTn id="1" dur="indefinite" restart="never" nodeType="tmRoot"/>
+      </p:par>
+    </p:tnLst>
+  </p:timing>
 </p:sld>
 </file>
 
@@ -15264,7 +15600,7 @@
   <a:extraClrSchemeLst/>
   <a:extLst>
     <a:ext uri="{05A4C25C-085E-4340-85A3-A5531E510DB2}">
-      <thm15:themeFamily xmlns:thm15="http://schemas.microsoft.com/office/thememl/2012/main" xmlns="" name="Office Theme" id="{62F939B6-93AF-4DB8-9C6B-D6C7DFDC589F}" vid="{4A3C46E8-61CC-4603-A589-7422A47A8E4A}"/>
+      <thm15:themeFamily xmlns="" xmlns:thm15="http://schemas.microsoft.com/office/thememl/2012/main" name="Office Theme" id="{62F939B6-93AF-4DB8-9C6B-D6C7DFDC589F}" vid="{4A3C46E8-61CC-4603-A589-7422A47A8E4A}"/>
     </a:ext>
   </a:extLst>
 </a:theme>
@@ -15559,7 +15895,7 @@
   <a:extraClrSchemeLst/>
   <a:extLst>
     <a:ext uri="{05A4C25C-085E-4340-85A3-A5531E510DB2}">
-      <thm15:themeFamily xmlns:thm15="http://schemas.microsoft.com/office/thememl/2012/main" xmlns="" name="Office Theme" id="{62F939B6-93AF-4DB8-9C6B-D6C7DFDC589F}" vid="{4A3C46E8-61CC-4603-A589-7422A47A8E4A}"/>
+      <thm15:themeFamily xmlns="" xmlns:thm15="http://schemas.microsoft.com/office/thememl/2012/main" name="Office Theme" id="{62F939B6-93AF-4DB8-9C6B-D6C7DFDC589F}" vid="{4A3C46E8-61CC-4603-A589-7422A47A8E4A}"/>
     </a:ext>
   </a:extLst>
 </a:theme>

--- a/Documents/CS_723_Mang_Khong_Day_Nang_Cao.pptx
+++ b/Documents/CS_723_Mang_Khong_Day_Nang_Cao.pptx
@@ -123,7 +123,7 @@
   </p:defaultTextStyle>
   <p:extLst>
     <p:ext uri="{EFAFB233-063F-42B5-8137-9DF3F51BA10A}">
-      <p15:sldGuideLst xmlns="" xmlns:p15="http://schemas.microsoft.com/office/powerpoint/2012/main"/>
+      <p15:sldGuideLst xmlns:p15="http://schemas.microsoft.com/office/powerpoint/2012/main" xmlns=""/>
     </p:ext>
   </p:extLst>
 </p:presentation>
@@ -271,11 +271,11 @@
         <c:dLbls>
           <c:showVal val="1"/>
         </c:dLbls>
-        <c:axId val="164982784"/>
-        <c:axId val="164984320"/>
+        <c:axId val="150159360"/>
+        <c:axId val="150160896"/>
       </c:barChart>
       <c:catAx>
-        <c:axId val="164982784"/>
+        <c:axId val="150159360"/>
         <c:scaling>
           <c:orientation val="minMax"/>
         </c:scaling>
@@ -306,7 +306,7 @@
             <a:endParaRPr lang="en-US"/>
           </a:p>
         </c:txPr>
-        <c:crossAx val="164984320"/>
+        <c:crossAx val="150160896"/>
         <c:crosses val="autoZero"/>
         <c:auto val="1"/>
         <c:lblAlgn val="ctr"/>
@@ -314,7 +314,7 @@
         <c:noMultiLvlLbl val="1"/>
       </c:catAx>
       <c:valAx>
-        <c:axId val="164984320"/>
+        <c:axId val="150160896"/>
         <c:scaling>
           <c:orientation val="minMax"/>
         </c:scaling>
@@ -356,7 +356,7 @@
             <a:endParaRPr lang="en-US"/>
           </a:p>
         </c:txPr>
-        <c:crossAx val="164982784"/>
+        <c:crossAx val="150159360"/>
         <c:crosses val="autoZero"/>
         <c:crossBetween val="between"/>
       </c:valAx>
@@ -636,7 +636,7 @@
     </p:spTree>
     <p:extLst>
       <p:ext uri="{BB962C8B-B14F-4D97-AF65-F5344CB8AC3E}">
-        <p14:creationId xmlns="" xmlns:p14="http://schemas.microsoft.com/office/powerpoint/2010/main" val="186005870"/>
+        <p14:creationId xmlns:p14="http://schemas.microsoft.com/office/powerpoint/2010/main" xmlns="" val="186005870"/>
       </p:ext>
     </p:extLst>
   </p:cSld>
@@ -811,7 +811,7 @@
     </p:spTree>
     <p:extLst>
       <p:ext uri="{BB962C8B-B14F-4D97-AF65-F5344CB8AC3E}">
-        <p14:creationId xmlns="" xmlns:p14="http://schemas.microsoft.com/office/powerpoint/2010/main" val="1024086991"/>
+        <p14:creationId xmlns:p14="http://schemas.microsoft.com/office/powerpoint/2010/main" xmlns="" val="1024086991"/>
       </p:ext>
     </p:extLst>
   </p:cSld>
@@ -896,7 +896,7 @@
     </p:spTree>
     <p:extLst>
       <p:ext uri="{BB962C8B-B14F-4D97-AF65-F5344CB8AC3E}">
-        <p14:creationId xmlns="" xmlns:p14="http://schemas.microsoft.com/office/powerpoint/2010/main" val="1024086991"/>
+        <p14:creationId xmlns:p14="http://schemas.microsoft.com/office/powerpoint/2010/main" xmlns="" val="1024086991"/>
       </p:ext>
     </p:extLst>
   </p:cSld>
@@ -981,7 +981,7 @@
     </p:spTree>
     <p:extLst>
       <p:ext uri="{BB962C8B-B14F-4D97-AF65-F5344CB8AC3E}">
-        <p14:creationId xmlns="" xmlns:p14="http://schemas.microsoft.com/office/powerpoint/2010/main" val="1024086991"/>
+        <p14:creationId xmlns:p14="http://schemas.microsoft.com/office/powerpoint/2010/main" xmlns="" val="1024086991"/>
       </p:ext>
     </p:extLst>
   </p:cSld>
@@ -1066,7 +1066,7 @@
     </p:spTree>
     <p:extLst>
       <p:ext uri="{BB962C8B-B14F-4D97-AF65-F5344CB8AC3E}">
-        <p14:creationId xmlns="" xmlns:p14="http://schemas.microsoft.com/office/powerpoint/2010/main" val="1024086991"/>
+        <p14:creationId xmlns:p14="http://schemas.microsoft.com/office/powerpoint/2010/main" xmlns="" val="1024086991"/>
       </p:ext>
     </p:extLst>
   </p:cSld>
@@ -1151,7 +1151,7 @@
     </p:spTree>
     <p:extLst>
       <p:ext uri="{BB962C8B-B14F-4D97-AF65-F5344CB8AC3E}">
-        <p14:creationId xmlns="" xmlns:p14="http://schemas.microsoft.com/office/powerpoint/2010/main" val="1024086991"/>
+        <p14:creationId xmlns:p14="http://schemas.microsoft.com/office/powerpoint/2010/main" xmlns="" val="1024086991"/>
       </p:ext>
     </p:extLst>
   </p:cSld>
@@ -1236,7 +1236,7 @@
     </p:spTree>
     <p:extLst>
       <p:ext uri="{BB962C8B-B14F-4D97-AF65-F5344CB8AC3E}">
-        <p14:creationId xmlns="" xmlns:p14="http://schemas.microsoft.com/office/powerpoint/2010/main" val="1024086991"/>
+        <p14:creationId xmlns:p14="http://schemas.microsoft.com/office/powerpoint/2010/main" xmlns="" val="1024086991"/>
       </p:ext>
     </p:extLst>
   </p:cSld>
@@ -1321,7 +1321,7 @@
     </p:spTree>
     <p:extLst>
       <p:ext uri="{BB962C8B-B14F-4D97-AF65-F5344CB8AC3E}">
-        <p14:creationId xmlns="" xmlns:p14="http://schemas.microsoft.com/office/powerpoint/2010/main" val="1024086991"/>
+        <p14:creationId xmlns:p14="http://schemas.microsoft.com/office/powerpoint/2010/main" xmlns="" val="1024086991"/>
       </p:ext>
     </p:extLst>
   </p:cSld>
@@ -1406,7 +1406,7 @@
     </p:spTree>
     <p:extLst>
       <p:ext uri="{BB962C8B-B14F-4D97-AF65-F5344CB8AC3E}">
-        <p14:creationId xmlns="" xmlns:p14="http://schemas.microsoft.com/office/powerpoint/2010/main" val="1024086991"/>
+        <p14:creationId xmlns:p14="http://schemas.microsoft.com/office/powerpoint/2010/main" xmlns="" val="1024086991"/>
       </p:ext>
     </p:extLst>
   </p:cSld>
@@ -1491,7 +1491,7 @@
     </p:spTree>
     <p:extLst>
       <p:ext uri="{BB962C8B-B14F-4D97-AF65-F5344CB8AC3E}">
-        <p14:creationId xmlns="" xmlns:p14="http://schemas.microsoft.com/office/powerpoint/2010/main" val="1024086991"/>
+        <p14:creationId xmlns:p14="http://schemas.microsoft.com/office/powerpoint/2010/main" xmlns="" val="1024086991"/>
       </p:ext>
     </p:extLst>
   </p:cSld>
@@ -1576,7 +1576,7 @@
     </p:spTree>
     <p:extLst>
       <p:ext uri="{BB962C8B-B14F-4D97-AF65-F5344CB8AC3E}">
-        <p14:creationId xmlns="" xmlns:p14="http://schemas.microsoft.com/office/powerpoint/2010/main" val="1024086991"/>
+        <p14:creationId xmlns:p14="http://schemas.microsoft.com/office/powerpoint/2010/main" xmlns="" val="1024086991"/>
       </p:ext>
     </p:extLst>
   </p:cSld>
@@ -1661,7 +1661,7 @@
     </p:spTree>
     <p:extLst>
       <p:ext uri="{BB962C8B-B14F-4D97-AF65-F5344CB8AC3E}">
-        <p14:creationId xmlns="" xmlns:p14="http://schemas.microsoft.com/office/powerpoint/2010/main" val="1024086991"/>
+        <p14:creationId xmlns:p14="http://schemas.microsoft.com/office/powerpoint/2010/main" xmlns="" val="1024086991"/>
       </p:ext>
     </p:extLst>
   </p:cSld>
@@ -1746,7 +1746,7 @@
     </p:spTree>
     <p:extLst>
       <p:ext uri="{BB962C8B-B14F-4D97-AF65-F5344CB8AC3E}">
-        <p14:creationId xmlns="" xmlns:p14="http://schemas.microsoft.com/office/powerpoint/2010/main" val="1024086991"/>
+        <p14:creationId xmlns:p14="http://schemas.microsoft.com/office/powerpoint/2010/main" xmlns="" val="1024086991"/>
       </p:ext>
     </p:extLst>
   </p:cSld>
@@ -1831,7 +1831,7 @@
     </p:spTree>
     <p:extLst>
       <p:ext uri="{BB962C8B-B14F-4D97-AF65-F5344CB8AC3E}">
-        <p14:creationId xmlns="" xmlns:p14="http://schemas.microsoft.com/office/powerpoint/2010/main" val="1024086991"/>
+        <p14:creationId xmlns:p14="http://schemas.microsoft.com/office/powerpoint/2010/main" xmlns="" val="1024086991"/>
       </p:ext>
     </p:extLst>
   </p:cSld>
@@ -1916,7 +1916,7 @@
     </p:spTree>
     <p:extLst>
       <p:ext uri="{BB962C8B-B14F-4D97-AF65-F5344CB8AC3E}">
-        <p14:creationId xmlns="" xmlns:p14="http://schemas.microsoft.com/office/powerpoint/2010/main" val="1024086991"/>
+        <p14:creationId xmlns:p14="http://schemas.microsoft.com/office/powerpoint/2010/main" xmlns="" val="1024086991"/>
       </p:ext>
     </p:extLst>
   </p:cSld>
@@ -2001,7 +2001,7 @@
     </p:spTree>
     <p:extLst>
       <p:ext uri="{BB962C8B-B14F-4D97-AF65-F5344CB8AC3E}">
-        <p14:creationId xmlns="" xmlns:p14="http://schemas.microsoft.com/office/powerpoint/2010/main" val="1024086991"/>
+        <p14:creationId xmlns:p14="http://schemas.microsoft.com/office/powerpoint/2010/main" xmlns="" val="1024086991"/>
       </p:ext>
     </p:extLst>
   </p:cSld>
@@ -2086,7 +2086,7 @@
     </p:spTree>
     <p:extLst>
       <p:ext uri="{BB962C8B-B14F-4D97-AF65-F5344CB8AC3E}">
-        <p14:creationId xmlns="" xmlns:p14="http://schemas.microsoft.com/office/powerpoint/2010/main" val="1024086991"/>
+        <p14:creationId xmlns:p14="http://schemas.microsoft.com/office/powerpoint/2010/main" xmlns="" val="1024086991"/>
       </p:ext>
     </p:extLst>
   </p:cSld>
@@ -2171,7 +2171,7 @@
     </p:spTree>
     <p:extLst>
       <p:ext uri="{BB962C8B-B14F-4D97-AF65-F5344CB8AC3E}">
-        <p14:creationId xmlns="" xmlns:p14="http://schemas.microsoft.com/office/powerpoint/2010/main" val="1024086991"/>
+        <p14:creationId xmlns:p14="http://schemas.microsoft.com/office/powerpoint/2010/main" xmlns="" val="1024086991"/>
       </p:ext>
     </p:extLst>
   </p:cSld>
@@ -2256,7 +2256,7 @@
     </p:spTree>
     <p:extLst>
       <p:ext uri="{BB962C8B-B14F-4D97-AF65-F5344CB8AC3E}">
-        <p14:creationId xmlns="" xmlns:p14="http://schemas.microsoft.com/office/powerpoint/2010/main" val="1024086991"/>
+        <p14:creationId xmlns:p14="http://schemas.microsoft.com/office/powerpoint/2010/main" xmlns="" val="1024086991"/>
       </p:ext>
     </p:extLst>
   </p:cSld>
@@ -5232,7 +5232,7 @@
           <p:nvPr>
             <p:extLst>
               <p:ext uri="{D42A27DB-BD31-4B8C-83A1-F6EECF244321}">
-                <p14:modId xmlns="" xmlns:p14="http://schemas.microsoft.com/office/powerpoint/2010/main" val="1579011935"/>
+                <p14:modId xmlns:p14="http://schemas.microsoft.com/office/powerpoint/2010/main" xmlns="" val="1579011935"/>
               </p:ext>
             </p:extLst>
           </p:nvPr>
@@ -5249,28 +5249,28 @@
                 <a:gridCol w="1097280">
                   <a:extLst>
                     <a:ext uri="{9D8B030D-6E8A-4147-A177-3AD203B41FA5}">
-                      <a16:colId xmlns="" xmlns:a16="http://schemas.microsoft.com/office/drawing/2014/main" val="20000"/>
+                      <a16:colId xmlns:a16="http://schemas.microsoft.com/office/drawing/2014/main" xmlns="" val="20000"/>
                     </a:ext>
                   </a:extLst>
                 </a:gridCol>
                 <a:gridCol w="2258568">
                   <a:extLst>
                     <a:ext uri="{9D8B030D-6E8A-4147-A177-3AD203B41FA5}">
-                      <a16:colId xmlns="" xmlns:a16="http://schemas.microsoft.com/office/drawing/2014/main" val="20001"/>
+                      <a16:colId xmlns:a16="http://schemas.microsoft.com/office/drawing/2014/main" xmlns="" val="20001"/>
                     </a:ext>
                   </a:extLst>
                 </a:gridCol>
                 <a:gridCol w="2258568">
                   <a:extLst>
                     <a:ext uri="{9D8B030D-6E8A-4147-A177-3AD203B41FA5}">
-                      <a16:colId xmlns="" xmlns:a16="http://schemas.microsoft.com/office/drawing/2014/main" val="20002"/>
+                      <a16:colId xmlns:a16="http://schemas.microsoft.com/office/drawing/2014/main" xmlns="" val="20002"/>
                     </a:ext>
                   </a:extLst>
                 </a:gridCol>
                 <a:gridCol w="2258568">
                   <a:extLst>
                     <a:ext uri="{9D8B030D-6E8A-4147-A177-3AD203B41FA5}">
-                      <a16:colId xmlns="" xmlns:a16="http://schemas.microsoft.com/office/drawing/2014/main" val="20003"/>
+                      <a16:colId xmlns:a16="http://schemas.microsoft.com/office/drawing/2014/main" xmlns="" val="20003"/>
                     </a:ext>
                   </a:extLst>
                 </a:gridCol>
@@ -5550,7 +5550,7 @@
                 </a:tc>
                 <a:extLst>
                   <a:ext uri="{0D108BD9-81ED-4DB2-BD59-A6C34878D82A}">
-                    <a16:rowId xmlns="" xmlns:a16="http://schemas.microsoft.com/office/drawing/2014/main" val="10000"/>
+                    <a16:rowId xmlns:a16="http://schemas.microsoft.com/office/drawing/2014/main" xmlns="" val="10000"/>
                   </a:ext>
                 </a:extLst>
               </a:tr>
@@ -5829,7 +5829,7 @@
                 </a:tc>
                 <a:extLst>
                   <a:ext uri="{0D108BD9-81ED-4DB2-BD59-A6C34878D82A}">
-                    <a16:rowId xmlns="" xmlns:a16="http://schemas.microsoft.com/office/drawing/2014/main" val="10001"/>
+                    <a16:rowId xmlns:a16="http://schemas.microsoft.com/office/drawing/2014/main" xmlns="" val="10001"/>
                   </a:ext>
                 </a:extLst>
               </a:tr>
@@ -6108,7 +6108,7 @@
                 </a:tc>
                 <a:extLst>
                   <a:ext uri="{0D108BD9-81ED-4DB2-BD59-A6C34878D82A}">
-                    <a16:rowId xmlns="" xmlns:a16="http://schemas.microsoft.com/office/drawing/2014/main" val="10002"/>
+                    <a16:rowId xmlns:a16="http://schemas.microsoft.com/office/drawing/2014/main" xmlns="" val="10002"/>
                   </a:ext>
                 </a:extLst>
               </a:tr>
@@ -6387,7 +6387,7 @@
                 </a:tc>
                 <a:extLst>
                   <a:ext uri="{0D108BD9-81ED-4DB2-BD59-A6C34878D82A}">
-                    <a16:rowId xmlns="" xmlns:a16="http://schemas.microsoft.com/office/drawing/2014/main" val="10003"/>
+                    <a16:rowId xmlns:a16="http://schemas.microsoft.com/office/drawing/2014/main" xmlns="" val="10003"/>
                   </a:ext>
                 </a:extLst>
               </a:tr>
@@ -6666,7 +6666,7 @@
                 </a:tc>
                 <a:extLst>
                   <a:ext uri="{0D108BD9-81ED-4DB2-BD59-A6C34878D82A}">
-                    <a16:rowId xmlns="" xmlns:a16="http://schemas.microsoft.com/office/drawing/2014/main" val="10004"/>
+                    <a16:rowId xmlns:a16="http://schemas.microsoft.com/office/drawing/2014/main" xmlns="" val="10004"/>
                   </a:ext>
                 </a:extLst>
               </a:tr>
@@ -6945,7 +6945,7 @@
                 </a:tc>
                 <a:extLst>
                   <a:ext uri="{0D108BD9-81ED-4DB2-BD59-A6C34878D82A}">
-                    <a16:rowId xmlns="" xmlns:a16="http://schemas.microsoft.com/office/drawing/2014/main" val="10005"/>
+                    <a16:rowId xmlns:a16="http://schemas.microsoft.com/office/drawing/2014/main" xmlns="" val="10005"/>
                   </a:ext>
                 </a:extLst>
               </a:tr>
@@ -7224,7 +7224,7 @@
                 </a:tc>
                 <a:extLst>
                   <a:ext uri="{0D108BD9-81ED-4DB2-BD59-A6C34878D82A}">
-                    <a16:rowId xmlns="" xmlns:a16="http://schemas.microsoft.com/office/drawing/2014/main" val="10006"/>
+                    <a16:rowId xmlns:a16="http://schemas.microsoft.com/office/drawing/2014/main" xmlns="" val="10006"/>
                   </a:ext>
                 </a:extLst>
               </a:tr>
@@ -7503,7 +7503,7 @@
                 </a:tc>
                 <a:extLst>
                   <a:ext uri="{0D108BD9-81ED-4DB2-BD59-A6C34878D82A}">
-                    <a16:rowId xmlns="" xmlns:a16="http://schemas.microsoft.com/office/drawing/2014/main" val="10007"/>
+                    <a16:rowId xmlns:a16="http://schemas.microsoft.com/office/drawing/2014/main" xmlns="" val="10007"/>
                   </a:ext>
                 </a:extLst>
               </a:tr>
@@ -7782,7 +7782,7 @@
                 </a:tc>
                 <a:extLst>
                   <a:ext uri="{0D108BD9-81ED-4DB2-BD59-A6C34878D82A}">
-                    <a16:rowId xmlns="" xmlns:a16="http://schemas.microsoft.com/office/drawing/2014/main" val="10008"/>
+                    <a16:rowId xmlns:a16="http://schemas.microsoft.com/office/drawing/2014/main" xmlns="" val="10008"/>
                   </a:ext>
                 </a:extLst>
               </a:tr>
@@ -8061,7 +8061,7 @@
                 </a:tc>
                 <a:extLst>
                   <a:ext uri="{0D108BD9-81ED-4DB2-BD59-A6C34878D82A}">
-                    <a16:rowId xmlns="" xmlns:a16="http://schemas.microsoft.com/office/drawing/2014/main" val="10009"/>
+                    <a16:rowId xmlns:a16="http://schemas.microsoft.com/office/drawing/2014/main" xmlns="" val="10009"/>
                   </a:ext>
                 </a:extLst>
               </a:tr>
@@ -8340,7 +8340,7 @@
                 </a:tc>
                 <a:extLst>
                   <a:ext uri="{0D108BD9-81ED-4DB2-BD59-A6C34878D82A}">
-                    <a16:rowId xmlns="" xmlns:a16="http://schemas.microsoft.com/office/drawing/2014/main" val="10010"/>
+                    <a16:rowId xmlns:a16="http://schemas.microsoft.com/office/drawing/2014/main" xmlns="" val="10010"/>
                   </a:ext>
                 </a:extLst>
               </a:tr>
@@ -13860,15 +13860,15 @@
                 <a:solidFill>
                   <a:srgbClr val="FFFFFF"/>
                 </a:solidFill>
-                <a:latin typeface="Times New Roman"/>
+                <a:latin typeface="Times New Roman" pitchFamily="18" charset="0"/>
                 <a:ea typeface="Trebuchet MS" pitchFamily="34" charset="-122"/>
-                <a:cs typeface="Times New Roman"/>
+                <a:cs typeface="Times New Roman" pitchFamily="18" charset="0"/>
               </a:rPr>
               <a:t>Xây dựng mô hình toán học</a:t>
             </a:r>
             <a:endParaRPr lang="en-US" sz="2400" dirty="0">
-              <a:latin typeface="Times New Roman"/>
-              <a:cs typeface="Times New Roman"/>
+              <a:latin typeface="Times New Roman" pitchFamily="18" charset="0"/>
+              <a:cs typeface="Times New Roman" pitchFamily="18" charset="0"/>
             </a:endParaRPr>
           </a:p>
         </p:txBody>
@@ -13924,15 +13924,15 @@
                 <a:solidFill>
                   <a:srgbClr val="0A1628"/>
                 </a:solidFill>
-                <a:latin typeface="Times New Roman"/>
+                <a:latin typeface="Times New Roman" pitchFamily="18" charset="0"/>
                 <a:ea typeface="Trebuchet MS" pitchFamily="34" charset="-122"/>
-                <a:cs typeface="Times New Roman"/>
+                <a:cs typeface="Times New Roman" pitchFamily="18" charset="0"/>
               </a:rPr>
               <a:t>1</a:t>
             </a:r>
             <a:endParaRPr lang="en-US" sz="1600" dirty="0">
-              <a:latin typeface="Times New Roman"/>
-              <a:cs typeface="Times New Roman"/>
+              <a:latin typeface="Times New Roman" pitchFamily="18" charset="0"/>
+              <a:cs typeface="Times New Roman" pitchFamily="18" charset="0"/>
             </a:endParaRPr>
           </a:p>
         </p:txBody>
@@ -13966,15 +13966,15 @@
                 <a:solidFill>
                   <a:srgbClr val="FFFFFF"/>
                 </a:solidFill>
-                <a:latin typeface="Times New Roman"/>
+                <a:latin typeface="Times New Roman" pitchFamily="18" charset="0"/>
                 <a:ea typeface="Trebuchet MS" pitchFamily="34" charset="-122"/>
-                <a:cs typeface="Times New Roman"/>
+                <a:cs typeface="Times New Roman" pitchFamily="18" charset="0"/>
               </a:rPr>
               <a:t>Khoảng cách hình học</a:t>
             </a:r>
             <a:endParaRPr lang="en-US" sz="1300" dirty="0">
-              <a:latin typeface="Times New Roman"/>
-              <a:cs typeface="Times New Roman"/>
+              <a:latin typeface="Times New Roman" pitchFamily="18" charset="0"/>
+              <a:cs typeface="Times New Roman" pitchFamily="18" charset="0"/>
             </a:endParaRPr>
           </a:p>
         </p:txBody>
@@ -14005,6 +14005,8 @@
                 <a:solidFill>
                   <a:srgbClr val="00B0F0"/>
                 </a:solidFill>
+                <a:latin typeface="Times New Roman" pitchFamily="18" charset="0"/>
+                <a:cs typeface="Times New Roman" pitchFamily="18" charset="0"/>
               </a:rPr>
               <a:t>d</a:t>
             </a:r>
@@ -14013,6 +14015,8 @@
                 <a:solidFill>
                   <a:srgbClr val="00B0F0"/>
                 </a:solidFill>
+                <a:latin typeface="Times New Roman" pitchFamily="18" charset="0"/>
+                <a:cs typeface="Times New Roman" pitchFamily="18" charset="0"/>
               </a:rPr>
               <a:t>u</a:t>
             </a:r>
@@ -14021,6 +14025,8 @@
                 <a:solidFill>
                   <a:srgbClr val="00B0F0"/>
                 </a:solidFill>
+                <a:latin typeface="Times New Roman" pitchFamily="18" charset="0"/>
+                <a:cs typeface="Times New Roman" pitchFamily="18" charset="0"/>
               </a:rPr>
               <a:t> = √((x - </a:t>
             </a:r>
@@ -14029,6 +14035,8 @@
                 <a:solidFill>
                   <a:srgbClr val="00B0F0"/>
                 </a:solidFill>
+                <a:latin typeface="Times New Roman" pitchFamily="18" charset="0"/>
+                <a:cs typeface="Times New Roman" pitchFamily="18" charset="0"/>
               </a:rPr>
               <a:t>x</a:t>
             </a:r>
@@ -14037,6 +14045,8 @@
                 <a:solidFill>
                   <a:srgbClr val="00B0F0"/>
                 </a:solidFill>
+                <a:latin typeface="Times New Roman" pitchFamily="18" charset="0"/>
+                <a:cs typeface="Times New Roman" pitchFamily="18" charset="0"/>
               </a:rPr>
               <a:t>u</a:t>
             </a:r>
@@ -14045,6 +14055,8 @@
                 <a:solidFill>
                   <a:srgbClr val="00B0F0"/>
                 </a:solidFill>
+                <a:latin typeface="Times New Roman" pitchFamily="18" charset="0"/>
+                <a:cs typeface="Times New Roman" pitchFamily="18" charset="0"/>
               </a:rPr>
               <a:t>)</a:t>
             </a:r>
@@ -14053,6 +14065,8 @@
                 <a:solidFill>
                   <a:srgbClr val="00B0F0"/>
                 </a:solidFill>
+                <a:latin typeface="Times New Roman" pitchFamily="18" charset="0"/>
+                <a:cs typeface="Times New Roman" pitchFamily="18" charset="0"/>
               </a:rPr>
               <a:t>2</a:t>
             </a:r>
@@ -14061,6 +14075,8 @@
                 <a:solidFill>
                   <a:srgbClr val="00B0F0"/>
                 </a:solidFill>
+                <a:latin typeface="Times New Roman" pitchFamily="18" charset="0"/>
+                <a:cs typeface="Times New Roman" pitchFamily="18" charset="0"/>
               </a:rPr>
               <a:t> + (y - </a:t>
             </a:r>
@@ -14069,6 +14085,8 @@
                 <a:solidFill>
                   <a:srgbClr val="00B0F0"/>
                 </a:solidFill>
+                <a:latin typeface="Times New Roman" pitchFamily="18" charset="0"/>
+                <a:cs typeface="Times New Roman" pitchFamily="18" charset="0"/>
               </a:rPr>
               <a:t>y</a:t>
             </a:r>
@@ -14077,6 +14095,8 @@
                 <a:solidFill>
                   <a:srgbClr val="00B0F0"/>
                 </a:solidFill>
+                <a:latin typeface="Times New Roman" pitchFamily="18" charset="0"/>
+                <a:cs typeface="Times New Roman" pitchFamily="18" charset="0"/>
               </a:rPr>
               <a:t>u</a:t>
             </a:r>
@@ -14085,6 +14105,8 @@
                 <a:solidFill>
                   <a:srgbClr val="00B0F0"/>
                 </a:solidFill>
+                <a:latin typeface="Times New Roman" pitchFamily="18" charset="0"/>
+                <a:cs typeface="Times New Roman" pitchFamily="18" charset="0"/>
               </a:rPr>
               <a:t>)</a:t>
             </a:r>
@@ -14093,6 +14115,8 @@
                 <a:solidFill>
                   <a:srgbClr val="00B0F0"/>
                 </a:solidFill>
+                <a:latin typeface="Times New Roman" pitchFamily="18" charset="0"/>
+                <a:cs typeface="Times New Roman" pitchFamily="18" charset="0"/>
               </a:rPr>
               <a:t>2</a:t>
             </a:r>
@@ -14101,6 +14125,8 @@
                 <a:solidFill>
                   <a:srgbClr val="00B0F0"/>
                 </a:solidFill>
+                <a:latin typeface="Times New Roman" pitchFamily="18" charset="0"/>
+                <a:cs typeface="Times New Roman" pitchFamily="18" charset="0"/>
               </a:rPr>
               <a:t> + h</a:t>
             </a:r>
@@ -14109,6 +14135,8 @@
                 <a:solidFill>
                   <a:srgbClr val="00B0F0"/>
                 </a:solidFill>
+                <a:latin typeface="Times New Roman" pitchFamily="18" charset="0"/>
+                <a:cs typeface="Times New Roman" pitchFamily="18" charset="0"/>
               </a:rPr>
               <a:t>2</a:t>
             </a:r>
@@ -14117,6 +14145,8 @@
                 <a:solidFill>
                   <a:srgbClr val="00B0F0"/>
                 </a:solidFill>
+                <a:latin typeface="Times New Roman" pitchFamily="18" charset="0"/>
+                <a:cs typeface="Times New Roman" pitchFamily="18" charset="0"/>
               </a:rPr>
               <a:t>)</a:t>
             </a:r>
@@ -14124,6 +14154,8 @@
               <a:solidFill>
                 <a:srgbClr val="00B0F0"/>
               </a:solidFill>
+              <a:latin typeface="Times New Roman" pitchFamily="18" charset="0"/>
+              <a:cs typeface="Times New Roman" pitchFamily="18" charset="0"/>
             </a:endParaRPr>
           </a:p>
           <a:p>
@@ -14134,8 +14166,8 @@
               <a:solidFill>
                 <a:srgbClr val="00B0F0"/>
               </a:solidFill>
-              <a:latin typeface="Times New Roman"/>
-              <a:cs typeface="Times New Roman"/>
+              <a:latin typeface="Times New Roman" pitchFamily="18" charset="0"/>
+              <a:cs typeface="Times New Roman" pitchFamily="18" charset="0"/>
             </a:endParaRPr>
           </a:p>
         </p:txBody>
@@ -14169,15 +14201,15 @@
                 <a:solidFill>
                   <a:srgbClr val="8899AA"/>
                 </a:solidFill>
-                <a:latin typeface="Times New Roman"/>
+                <a:latin typeface="Times New Roman" pitchFamily="18" charset="0"/>
                 <a:ea typeface="Calibri" pitchFamily="34" charset="-122"/>
-                <a:cs typeface="Times New Roman"/>
+                <a:cs typeface="Times New Roman" pitchFamily="18" charset="0"/>
               </a:rPr>
               <a:t>Euclide 3D giữa UAV và user u</a:t>
             </a:r>
             <a:endParaRPr lang="en-US" sz="1150" dirty="0">
-              <a:latin typeface="Times New Roman"/>
-              <a:cs typeface="Times New Roman"/>
+              <a:latin typeface="Times New Roman" pitchFamily="18" charset="0"/>
+              <a:cs typeface="Times New Roman" pitchFamily="18" charset="0"/>
             </a:endParaRPr>
           </a:p>
         </p:txBody>
@@ -14233,15 +14265,15 @@
                 <a:solidFill>
                   <a:srgbClr val="0A1628"/>
                 </a:solidFill>
-                <a:latin typeface="Times New Roman"/>
+                <a:latin typeface="Times New Roman" pitchFamily="18" charset="0"/>
                 <a:ea typeface="Trebuchet MS" pitchFamily="34" charset="-122"/>
-                <a:cs typeface="Times New Roman"/>
+                <a:cs typeface="Times New Roman" pitchFamily="18" charset="0"/>
               </a:rPr>
               <a:t>2</a:t>
             </a:r>
             <a:endParaRPr lang="en-US" sz="1600" dirty="0">
-              <a:latin typeface="Times New Roman"/>
-              <a:cs typeface="Times New Roman"/>
+              <a:latin typeface="Times New Roman" pitchFamily="18" charset="0"/>
+              <a:cs typeface="Times New Roman" pitchFamily="18" charset="0"/>
             </a:endParaRPr>
           </a:p>
         </p:txBody>
@@ -14275,15 +14307,15 @@
                 <a:solidFill>
                   <a:srgbClr val="FFFFFF"/>
                 </a:solidFill>
-                <a:latin typeface="Times New Roman"/>
+                <a:latin typeface="Times New Roman" pitchFamily="18" charset="0"/>
                 <a:ea typeface="Trebuchet MS" pitchFamily="34" charset="-122"/>
-                <a:cs typeface="Times New Roman"/>
+                <a:cs typeface="Times New Roman" pitchFamily="18" charset="0"/>
               </a:rPr>
               <a:t>Suy hao đường truyền (Path Loss)</a:t>
             </a:r>
             <a:endParaRPr lang="en-US" sz="1300" dirty="0">
-              <a:latin typeface="Times New Roman"/>
-              <a:cs typeface="Times New Roman"/>
+              <a:latin typeface="Times New Roman" pitchFamily="18" charset="0"/>
+              <a:cs typeface="Times New Roman" pitchFamily="18" charset="0"/>
             </a:endParaRPr>
           </a:p>
         </p:txBody>
@@ -14314,6 +14346,8 @@
                 <a:solidFill>
                   <a:srgbClr val="00B0F0"/>
                 </a:solidFill>
+                <a:latin typeface="Times New Roman" pitchFamily="18" charset="0"/>
+                <a:cs typeface="Times New Roman" pitchFamily="18" charset="0"/>
               </a:rPr>
               <a:t>PL</a:t>
             </a:r>
@@ -14322,6 +14356,8 @@
                 <a:solidFill>
                   <a:srgbClr val="00B0F0"/>
                 </a:solidFill>
+                <a:latin typeface="Times New Roman" pitchFamily="18" charset="0"/>
+                <a:cs typeface="Times New Roman" pitchFamily="18" charset="0"/>
               </a:rPr>
               <a:t>u</a:t>
             </a:r>
@@ -14330,6 +14366,8 @@
                 <a:solidFill>
                   <a:srgbClr val="00B0F0"/>
                 </a:solidFill>
+                <a:latin typeface="Times New Roman" pitchFamily="18" charset="0"/>
+                <a:cs typeface="Times New Roman" pitchFamily="18" charset="0"/>
               </a:rPr>
               <a:t>(d) = PL</a:t>
             </a:r>
@@ -14338,6 +14376,8 @@
                 <a:solidFill>
                   <a:srgbClr val="00B0F0"/>
                 </a:solidFill>
+                <a:latin typeface="Times New Roman" pitchFamily="18" charset="0"/>
+                <a:cs typeface="Times New Roman" pitchFamily="18" charset="0"/>
               </a:rPr>
               <a:t>0</a:t>
             </a:r>
@@ -14346,6 +14386,8 @@
                 <a:solidFill>
                   <a:srgbClr val="00B0F0"/>
                 </a:solidFill>
+                <a:latin typeface="Times New Roman" pitchFamily="18" charset="0"/>
+                <a:cs typeface="Times New Roman" pitchFamily="18" charset="0"/>
               </a:rPr>
               <a:t> + 10 • α • log</a:t>
             </a:r>
@@ -14354,6 +14396,8 @@
                 <a:solidFill>
                   <a:srgbClr val="00B0F0"/>
                 </a:solidFill>
+                <a:latin typeface="Times New Roman" pitchFamily="18" charset="0"/>
+                <a:cs typeface="Times New Roman" pitchFamily="18" charset="0"/>
               </a:rPr>
               <a:t>10</a:t>
             </a:r>
@@ -14362,6 +14406,8 @@
                 <a:solidFill>
                   <a:srgbClr val="00B0F0"/>
                 </a:solidFill>
+                <a:latin typeface="Times New Roman" pitchFamily="18" charset="0"/>
+                <a:cs typeface="Times New Roman" pitchFamily="18" charset="0"/>
               </a:rPr>
               <a:t>(d</a:t>
             </a:r>
@@ -14370,6 +14416,8 @@
                 <a:solidFill>
                   <a:srgbClr val="00B0F0"/>
                 </a:solidFill>
+                <a:latin typeface="Times New Roman" pitchFamily="18" charset="0"/>
+                <a:cs typeface="Times New Roman" pitchFamily="18" charset="0"/>
               </a:rPr>
               <a:t>u</a:t>
             </a:r>
@@ -14378,6 +14426,8 @@
                 <a:solidFill>
                   <a:srgbClr val="00B0F0"/>
                 </a:solidFill>
+                <a:latin typeface="Times New Roman" pitchFamily="18" charset="0"/>
+                <a:cs typeface="Times New Roman" pitchFamily="18" charset="0"/>
               </a:rPr>
               <a:t>)</a:t>
             </a:r>
@@ -14385,6 +14435,8 @@
               <a:solidFill>
                 <a:srgbClr val="00B0F0"/>
               </a:solidFill>
+              <a:latin typeface="Times New Roman" pitchFamily="18" charset="0"/>
+              <a:cs typeface="Times New Roman" pitchFamily="18" charset="0"/>
             </a:endParaRPr>
           </a:p>
         </p:txBody>
@@ -14418,15 +14470,15 @@
                 <a:solidFill>
                   <a:srgbClr val="8899AA"/>
                 </a:solidFill>
-                <a:latin typeface="Times New Roman"/>
+                <a:latin typeface="Times New Roman" pitchFamily="18" charset="0"/>
                 <a:ea typeface="Calibri" pitchFamily="34" charset="-122"/>
-                <a:cs typeface="Times New Roman"/>
+                <a:cs typeface="Times New Roman" pitchFamily="18" charset="0"/>
               </a:rPr>
               <a:t>mmWave LoS, α = 2.2, f_c = 28 GHz</a:t>
             </a:r>
             <a:endParaRPr lang="en-US" sz="1150" dirty="0">
-              <a:latin typeface="Times New Roman"/>
-              <a:cs typeface="Times New Roman"/>
+              <a:latin typeface="Times New Roman" pitchFamily="18" charset="0"/>
+              <a:cs typeface="Times New Roman" pitchFamily="18" charset="0"/>
             </a:endParaRPr>
           </a:p>
         </p:txBody>
@@ -14482,15 +14534,15 @@
                 <a:solidFill>
                   <a:srgbClr val="0A1628"/>
                 </a:solidFill>
-                <a:latin typeface="Times New Roman"/>
+                <a:latin typeface="Times New Roman" pitchFamily="18" charset="0"/>
                 <a:ea typeface="Trebuchet MS" pitchFamily="34" charset="-122"/>
-                <a:cs typeface="Times New Roman"/>
+                <a:cs typeface="Times New Roman" pitchFamily="18" charset="0"/>
               </a:rPr>
               <a:t>3</a:t>
             </a:r>
             <a:endParaRPr lang="en-US" sz="1600" dirty="0">
-              <a:latin typeface="Times New Roman"/>
-              <a:cs typeface="Times New Roman"/>
+              <a:latin typeface="Times New Roman" pitchFamily="18" charset="0"/>
+              <a:cs typeface="Times New Roman" pitchFamily="18" charset="0"/>
             </a:endParaRPr>
           </a:p>
         </p:txBody>
@@ -14524,15 +14576,15 @@
                 <a:solidFill>
                   <a:srgbClr val="FFFFFF"/>
                 </a:solidFill>
-                <a:latin typeface="Times New Roman"/>
+                <a:latin typeface="Times New Roman" pitchFamily="18" charset="0"/>
                 <a:ea typeface="Trebuchet MS" pitchFamily="34" charset="-122"/>
-                <a:cs typeface="Times New Roman"/>
+                <a:cs typeface="Times New Roman" pitchFamily="18" charset="0"/>
               </a:rPr>
               <a:t>Tỷ số tín hiệu / nhiễu (SNR)</a:t>
             </a:r>
             <a:endParaRPr lang="en-US" sz="1300" dirty="0">
-              <a:latin typeface="Times New Roman"/>
-              <a:cs typeface="Times New Roman"/>
+              <a:latin typeface="Times New Roman" pitchFamily="18" charset="0"/>
+              <a:cs typeface="Times New Roman" pitchFamily="18" charset="0"/>
             </a:endParaRPr>
           </a:p>
         </p:txBody>
@@ -14563,6 +14615,8 @@
                 <a:solidFill>
                   <a:srgbClr val="00B0F0"/>
                 </a:solidFill>
+                <a:latin typeface="Times New Roman" pitchFamily="18" charset="0"/>
+                <a:cs typeface="Times New Roman" pitchFamily="18" charset="0"/>
               </a:rPr>
               <a:t>γ</a:t>
             </a:r>
@@ -14571,6 +14625,8 @@
                 <a:solidFill>
                   <a:srgbClr val="00B0F0"/>
                 </a:solidFill>
+                <a:latin typeface="Times New Roman" pitchFamily="18" charset="0"/>
+                <a:cs typeface="Times New Roman" pitchFamily="18" charset="0"/>
               </a:rPr>
               <a:t>u</a:t>
             </a:r>
@@ -14579,6 +14635,8 @@
                 <a:solidFill>
                   <a:srgbClr val="00B0F0"/>
                 </a:solidFill>
+                <a:latin typeface="Times New Roman" pitchFamily="18" charset="0"/>
+                <a:cs typeface="Times New Roman" pitchFamily="18" charset="0"/>
               </a:rPr>
               <a:t> = </a:t>
             </a:r>
@@ -14587,6 +14645,8 @@
                 <a:solidFill>
                   <a:srgbClr val="00B0F0"/>
                 </a:solidFill>
+                <a:latin typeface="Times New Roman" pitchFamily="18" charset="0"/>
+                <a:cs typeface="Times New Roman" pitchFamily="18" charset="0"/>
               </a:rPr>
               <a:t>P</a:t>
             </a:r>
@@ -14595,6 +14655,8 @@
                 <a:solidFill>
                   <a:srgbClr val="00B0F0"/>
                 </a:solidFill>
+                <a:latin typeface="Times New Roman" pitchFamily="18" charset="0"/>
+                <a:cs typeface="Times New Roman" pitchFamily="18" charset="0"/>
               </a:rPr>
               <a:t>rx</a:t>
             </a:r>
@@ -14603,6 +14665,8 @@
                 <a:solidFill>
                   <a:srgbClr val="00B0F0"/>
                 </a:solidFill>
+                <a:latin typeface="Times New Roman" pitchFamily="18" charset="0"/>
+                <a:cs typeface="Times New Roman" pitchFamily="18" charset="0"/>
               </a:rPr>
               <a:t>, u</a:t>
             </a:r>
@@ -14611,6 +14675,8 @@
                 <a:solidFill>
                   <a:srgbClr val="00B0F0"/>
                 </a:solidFill>
+                <a:latin typeface="Times New Roman" pitchFamily="18" charset="0"/>
+                <a:cs typeface="Times New Roman" pitchFamily="18" charset="0"/>
               </a:rPr>
               <a:t> / σ</a:t>
             </a:r>
@@ -14619,6 +14685,8 @@
                 <a:solidFill>
                   <a:srgbClr val="00B0F0"/>
                 </a:solidFill>
+                <a:latin typeface="Times New Roman" pitchFamily="18" charset="0"/>
+                <a:cs typeface="Times New Roman" pitchFamily="18" charset="0"/>
               </a:rPr>
               <a:t>2</a:t>
             </a:r>
@@ -14626,6 +14694,8 @@
               <a:solidFill>
                 <a:srgbClr val="00B0F0"/>
               </a:solidFill>
+              <a:latin typeface="Times New Roman" pitchFamily="18" charset="0"/>
+              <a:cs typeface="Times New Roman" pitchFamily="18" charset="0"/>
             </a:endParaRPr>
           </a:p>
         </p:txBody>
@@ -14659,15 +14729,15 @@
                 <a:solidFill>
                   <a:srgbClr val="8899AA"/>
                 </a:solidFill>
-                <a:latin typeface="Times New Roman"/>
+                <a:latin typeface="Times New Roman" pitchFamily="18" charset="0"/>
                 <a:ea typeface="Calibri" pitchFamily="34" charset="-122"/>
-                <a:cs typeface="Times New Roman"/>
+                <a:cs typeface="Times New Roman" pitchFamily="18" charset="0"/>
               </a:rPr>
               <a:t>P_tx = 30 dBm, σ² = −100 dBm</a:t>
             </a:r>
             <a:endParaRPr lang="en-US" sz="1150" dirty="0">
-              <a:latin typeface="Times New Roman"/>
-              <a:cs typeface="Times New Roman"/>
+              <a:latin typeface="Times New Roman" pitchFamily="18" charset="0"/>
+              <a:cs typeface="Times New Roman" pitchFamily="18" charset="0"/>
             </a:endParaRPr>
           </a:p>
         </p:txBody>
@@ -14723,15 +14793,15 @@
                 <a:solidFill>
                   <a:srgbClr val="0A1628"/>
                 </a:solidFill>
-                <a:latin typeface="Times New Roman"/>
+                <a:latin typeface="Times New Roman" pitchFamily="18" charset="0"/>
                 <a:ea typeface="Trebuchet MS" pitchFamily="34" charset="-122"/>
-                <a:cs typeface="Times New Roman"/>
+                <a:cs typeface="Times New Roman" pitchFamily="18" charset="0"/>
               </a:rPr>
               <a:t>4</a:t>
             </a:r>
             <a:endParaRPr lang="en-US" sz="1600" dirty="0">
-              <a:latin typeface="Times New Roman"/>
-              <a:cs typeface="Times New Roman"/>
+              <a:latin typeface="Times New Roman" pitchFamily="18" charset="0"/>
+              <a:cs typeface="Times New Roman" pitchFamily="18" charset="0"/>
             </a:endParaRPr>
           </a:p>
         </p:txBody>
@@ -14765,15 +14835,15 @@
                 <a:solidFill>
                   <a:srgbClr val="FFFFFF"/>
                 </a:solidFill>
-                <a:latin typeface="Times New Roman"/>
+                <a:latin typeface="Times New Roman" pitchFamily="18" charset="0"/>
                 <a:ea typeface="Trebuchet MS" pitchFamily="34" charset="-122"/>
-                <a:cs typeface="Times New Roman"/>
+                <a:cs typeface="Times New Roman" pitchFamily="18" charset="0"/>
               </a:rPr>
               <a:t>Dung lượng Shannon (Throughput)</a:t>
             </a:r>
             <a:endParaRPr lang="en-US" sz="1300" dirty="0">
-              <a:latin typeface="Times New Roman"/>
-              <a:cs typeface="Times New Roman"/>
+              <a:latin typeface="Times New Roman" pitchFamily="18" charset="0"/>
+              <a:cs typeface="Times New Roman" pitchFamily="18" charset="0"/>
             </a:endParaRPr>
           </a:p>
         </p:txBody>
@@ -14804,6 +14874,8 @@
                 <a:solidFill>
                   <a:srgbClr val="00B0F0"/>
                 </a:solidFill>
+                <a:latin typeface="Times New Roman" pitchFamily="18" charset="0"/>
+                <a:cs typeface="Times New Roman" pitchFamily="18" charset="0"/>
               </a:rPr>
               <a:t>C</a:t>
             </a:r>
@@ -14812,6 +14884,8 @@
                 <a:solidFill>
                   <a:srgbClr val="00B0F0"/>
                 </a:solidFill>
+                <a:latin typeface="Times New Roman" pitchFamily="18" charset="0"/>
+                <a:cs typeface="Times New Roman" pitchFamily="18" charset="0"/>
               </a:rPr>
               <a:t>u</a:t>
             </a:r>
@@ -14820,6 +14894,8 @@
                 <a:solidFill>
                   <a:srgbClr val="00B0F0"/>
                 </a:solidFill>
+                <a:latin typeface="Times New Roman" pitchFamily="18" charset="0"/>
+                <a:cs typeface="Times New Roman" pitchFamily="18" charset="0"/>
               </a:rPr>
               <a:t> = B • log</a:t>
             </a:r>
@@ -14828,6 +14904,8 @@
                 <a:solidFill>
                   <a:srgbClr val="00B0F0"/>
                 </a:solidFill>
+                <a:latin typeface="Times New Roman" pitchFamily="18" charset="0"/>
+                <a:cs typeface="Times New Roman" pitchFamily="18" charset="0"/>
               </a:rPr>
               <a:t>2</a:t>
             </a:r>
@@ -14836,6 +14914,8 @@
                 <a:solidFill>
                   <a:srgbClr val="00B0F0"/>
                 </a:solidFill>
+                <a:latin typeface="Times New Roman" pitchFamily="18" charset="0"/>
+                <a:cs typeface="Times New Roman" pitchFamily="18" charset="0"/>
               </a:rPr>
               <a:t>(1 + </a:t>
             </a:r>
@@ -14844,6 +14924,8 @@
                 <a:solidFill>
                   <a:srgbClr val="00B0F0"/>
                 </a:solidFill>
+                <a:latin typeface="Times New Roman" pitchFamily="18" charset="0"/>
+                <a:cs typeface="Times New Roman" pitchFamily="18" charset="0"/>
               </a:rPr>
               <a:t>γ</a:t>
             </a:r>
@@ -14852,6 +14934,8 @@
                 <a:solidFill>
                   <a:srgbClr val="00B0F0"/>
                 </a:solidFill>
+                <a:latin typeface="Times New Roman" pitchFamily="18" charset="0"/>
+                <a:cs typeface="Times New Roman" pitchFamily="18" charset="0"/>
               </a:rPr>
               <a:t>u</a:t>
             </a:r>
@@ -14860,6 +14944,8 @@
                 <a:solidFill>
                   <a:srgbClr val="00B0F0"/>
                 </a:solidFill>
+                <a:latin typeface="Times New Roman" pitchFamily="18" charset="0"/>
+                <a:cs typeface="Times New Roman" pitchFamily="18" charset="0"/>
               </a:rPr>
               <a:t>)</a:t>
             </a:r>
@@ -14867,6 +14953,8 @@
               <a:solidFill>
                 <a:srgbClr val="00B0F0"/>
               </a:solidFill>
+              <a:latin typeface="Times New Roman" pitchFamily="18" charset="0"/>
+              <a:cs typeface="Times New Roman" pitchFamily="18" charset="0"/>
             </a:endParaRPr>
           </a:p>
         </p:txBody>
@@ -14900,15 +14988,15 @@
                 <a:solidFill>
                   <a:srgbClr val="8899AA"/>
                 </a:solidFill>
-                <a:latin typeface="Times New Roman"/>
+                <a:latin typeface="Times New Roman" pitchFamily="18" charset="0"/>
                 <a:ea typeface="Calibri" pitchFamily="34" charset="-122"/>
-                <a:cs typeface="Times New Roman"/>
+                <a:cs typeface="Times New Roman" pitchFamily="18" charset="0"/>
               </a:rPr>
               <a:t>B = 20 MHz, đơn vị: Mbps</a:t>
             </a:r>
             <a:endParaRPr lang="en-US" sz="1150" dirty="0">
-              <a:latin typeface="Times New Roman"/>
-              <a:cs typeface="Times New Roman"/>
+              <a:latin typeface="Times New Roman" pitchFamily="18" charset="0"/>
+              <a:cs typeface="Times New Roman" pitchFamily="18" charset="0"/>
             </a:endParaRPr>
           </a:p>
         </p:txBody>
@@ -15600,7 +15688,7 @@
   <a:extraClrSchemeLst/>
   <a:extLst>
     <a:ext uri="{05A4C25C-085E-4340-85A3-A5531E510DB2}">
-      <thm15:themeFamily xmlns="" xmlns:thm15="http://schemas.microsoft.com/office/thememl/2012/main" name="Office Theme" id="{62F939B6-93AF-4DB8-9C6B-D6C7DFDC589F}" vid="{4A3C46E8-61CC-4603-A589-7422A47A8E4A}"/>
+      <thm15:themeFamily xmlns:thm15="http://schemas.microsoft.com/office/thememl/2012/main" xmlns="" name="Office Theme" id="{62F939B6-93AF-4DB8-9C6B-D6C7DFDC589F}" vid="{4A3C46E8-61CC-4603-A589-7422A47A8E4A}"/>
     </a:ext>
   </a:extLst>
 </a:theme>
@@ -15895,7 +15983,7 @@
   <a:extraClrSchemeLst/>
   <a:extLst>
     <a:ext uri="{05A4C25C-085E-4340-85A3-A5531E510DB2}">
-      <thm15:themeFamily xmlns="" xmlns:thm15="http://schemas.microsoft.com/office/thememl/2012/main" name="Office Theme" id="{62F939B6-93AF-4DB8-9C6B-D6C7DFDC589F}" vid="{4A3C46E8-61CC-4603-A589-7422A47A8E4A}"/>
+      <thm15:themeFamily xmlns:thm15="http://schemas.microsoft.com/office/thememl/2012/main" xmlns="" name="Office Theme" id="{62F939B6-93AF-4DB8-9C6B-D6C7DFDC589F}" vid="{4A3C46E8-61CC-4603-A589-7422A47A8E4A}"/>
     </a:ext>
   </a:extLst>
 </a:theme>

--- a/Documents/CS_723_Mang_Khong_Day_Nang_Cao.pptx
+++ b/Documents/CS_723_Mang_Khong_Day_Nang_Cao.pptx
@@ -123,7 +123,7 @@
   </p:defaultTextStyle>
   <p:extLst>
     <p:ext uri="{EFAFB233-063F-42B5-8137-9DF3F51BA10A}">
-      <p15:sldGuideLst xmlns:p15="http://schemas.microsoft.com/office/powerpoint/2012/main" xmlns=""/>
+      <p15:sldGuideLst xmlns="" xmlns:p15="http://schemas.microsoft.com/office/powerpoint/2012/main"/>
     </p:ext>
   </p:extLst>
 </p:presentation>
@@ -271,11 +271,11 @@
         <c:dLbls>
           <c:showVal val="1"/>
         </c:dLbls>
-        <c:axId val="150159360"/>
-        <c:axId val="150160896"/>
+        <c:axId val="159784960"/>
+        <c:axId val="159786496"/>
       </c:barChart>
       <c:catAx>
-        <c:axId val="150159360"/>
+        <c:axId val="159784960"/>
         <c:scaling>
           <c:orientation val="minMax"/>
         </c:scaling>
@@ -306,7 +306,7 @@
             <a:endParaRPr lang="en-US"/>
           </a:p>
         </c:txPr>
-        <c:crossAx val="150160896"/>
+        <c:crossAx val="159786496"/>
         <c:crosses val="autoZero"/>
         <c:auto val="1"/>
         <c:lblAlgn val="ctr"/>
@@ -314,7 +314,7 @@
         <c:noMultiLvlLbl val="1"/>
       </c:catAx>
       <c:valAx>
-        <c:axId val="150160896"/>
+        <c:axId val="159786496"/>
         <c:scaling>
           <c:orientation val="minMax"/>
         </c:scaling>
@@ -356,7 +356,7 @@
             <a:endParaRPr lang="en-US"/>
           </a:p>
         </c:txPr>
-        <c:crossAx val="150159360"/>
+        <c:crossAx val="159784960"/>
         <c:crosses val="autoZero"/>
         <c:crossBetween val="between"/>
       </c:valAx>
@@ -636,7 +636,7 @@
     </p:spTree>
     <p:extLst>
       <p:ext uri="{BB962C8B-B14F-4D97-AF65-F5344CB8AC3E}">
-        <p14:creationId xmlns:p14="http://schemas.microsoft.com/office/powerpoint/2010/main" xmlns="" val="186005870"/>
+        <p14:creationId xmlns="" xmlns:p14="http://schemas.microsoft.com/office/powerpoint/2010/main" val="186005870"/>
       </p:ext>
     </p:extLst>
   </p:cSld>
@@ -811,7 +811,7 @@
     </p:spTree>
     <p:extLst>
       <p:ext uri="{BB962C8B-B14F-4D97-AF65-F5344CB8AC3E}">
-        <p14:creationId xmlns:p14="http://schemas.microsoft.com/office/powerpoint/2010/main" xmlns="" val="1024086991"/>
+        <p14:creationId xmlns="" xmlns:p14="http://schemas.microsoft.com/office/powerpoint/2010/main" val="1024086991"/>
       </p:ext>
     </p:extLst>
   </p:cSld>
@@ -896,7 +896,7 @@
     </p:spTree>
     <p:extLst>
       <p:ext uri="{BB962C8B-B14F-4D97-AF65-F5344CB8AC3E}">
-        <p14:creationId xmlns:p14="http://schemas.microsoft.com/office/powerpoint/2010/main" xmlns="" val="1024086991"/>
+        <p14:creationId xmlns="" xmlns:p14="http://schemas.microsoft.com/office/powerpoint/2010/main" val="1024086991"/>
       </p:ext>
     </p:extLst>
   </p:cSld>
@@ -981,7 +981,7 @@
     </p:spTree>
     <p:extLst>
       <p:ext uri="{BB962C8B-B14F-4D97-AF65-F5344CB8AC3E}">
-        <p14:creationId xmlns:p14="http://schemas.microsoft.com/office/powerpoint/2010/main" xmlns="" val="1024086991"/>
+        <p14:creationId xmlns="" xmlns:p14="http://schemas.microsoft.com/office/powerpoint/2010/main" val="1024086991"/>
       </p:ext>
     </p:extLst>
   </p:cSld>
@@ -1066,7 +1066,7 @@
     </p:spTree>
     <p:extLst>
       <p:ext uri="{BB962C8B-B14F-4D97-AF65-F5344CB8AC3E}">
-        <p14:creationId xmlns:p14="http://schemas.microsoft.com/office/powerpoint/2010/main" xmlns="" val="1024086991"/>
+        <p14:creationId xmlns="" xmlns:p14="http://schemas.microsoft.com/office/powerpoint/2010/main" val="1024086991"/>
       </p:ext>
     </p:extLst>
   </p:cSld>
@@ -1151,7 +1151,7 @@
     </p:spTree>
     <p:extLst>
       <p:ext uri="{BB962C8B-B14F-4D97-AF65-F5344CB8AC3E}">
-        <p14:creationId xmlns:p14="http://schemas.microsoft.com/office/powerpoint/2010/main" xmlns="" val="1024086991"/>
+        <p14:creationId xmlns="" xmlns:p14="http://schemas.microsoft.com/office/powerpoint/2010/main" val="1024086991"/>
       </p:ext>
     </p:extLst>
   </p:cSld>
@@ -1236,7 +1236,7 @@
     </p:spTree>
     <p:extLst>
       <p:ext uri="{BB962C8B-B14F-4D97-AF65-F5344CB8AC3E}">
-        <p14:creationId xmlns:p14="http://schemas.microsoft.com/office/powerpoint/2010/main" xmlns="" val="1024086991"/>
+        <p14:creationId xmlns="" xmlns:p14="http://schemas.microsoft.com/office/powerpoint/2010/main" val="1024086991"/>
       </p:ext>
     </p:extLst>
   </p:cSld>
@@ -1321,7 +1321,7 @@
     </p:spTree>
     <p:extLst>
       <p:ext uri="{BB962C8B-B14F-4D97-AF65-F5344CB8AC3E}">
-        <p14:creationId xmlns:p14="http://schemas.microsoft.com/office/powerpoint/2010/main" xmlns="" val="1024086991"/>
+        <p14:creationId xmlns="" xmlns:p14="http://schemas.microsoft.com/office/powerpoint/2010/main" val="1024086991"/>
       </p:ext>
     </p:extLst>
   </p:cSld>
@@ -1406,7 +1406,7 @@
     </p:spTree>
     <p:extLst>
       <p:ext uri="{BB962C8B-B14F-4D97-AF65-F5344CB8AC3E}">
-        <p14:creationId xmlns:p14="http://schemas.microsoft.com/office/powerpoint/2010/main" xmlns="" val="1024086991"/>
+        <p14:creationId xmlns="" xmlns:p14="http://schemas.microsoft.com/office/powerpoint/2010/main" val="1024086991"/>
       </p:ext>
     </p:extLst>
   </p:cSld>
@@ -1491,7 +1491,7 @@
     </p:spTree>
     <p:extLst>
       <p:ext uri="{BB962C8B-B14F-4D97-AF65-F5344CB8AC3E}">
-        <p14:creationId xmlns:p14="http://schemas.microsoft.com/office/powerpoint/2010/main" xmlns="" val="1024086991"/>
+        <p14:creationId xmlns="" xmlns:p14="http://schemas.microsoft.com/office/powerpoint/2010/main" val="1024086991"/>
       </p:ext>
     </p:extLst>
   </p:cSld>
@@ -1576,7 +1576,7 @@
     </p:spTree>
     <p:extLst>
       <p:ext uri="{BB962C8B-B14F-4D97-AF65-F5344CB8AC3E}">
-        <p14:creationId xmlns:p14="http://schemas.microsoft.com/office/powerpoint/2010/main" xmlns="" val="1024086991"/>
+        <p14:creationId xmlns="" xmlns:p14="http://schemas.microsoft.com/office/powerpoint/2010/main" val="1024086991"/>
       </p:ext>
     </p:extLst>
   </p:cSld>
@@ -1661,7 +1661,7 @@
     </p:spTree>
     <p:extLst>
       <p:ext uri="{BB962C8B-B14F-4D97-AF65-F5344CB8AC3E}">
-        <p14:creationId xmlns:p14="http://schemas.microsoft.com/office/powerpoint/2010/main" xmlns="" val="1024086991"/>
+        <p14:creationId xmlns="" xmlns:p14="http://schemas.microsoft.com/office/powerpoint/2010/main" val="1024086991"/>
       </p:ext>
     </p:extLst>
   </p:cSld>
@@ -1746,7 +1746,7 @@
     </p:spTree>
     <p:extLst>
       <p:ext uri="{BB962C8B-B14F-4D97-AF65-F5344CB8AC3E}">
-        <p14:creationId xmlns:p14="http://schemas.microsoft.com/office/powerpoint/2010/main" xmlns="" val="1024086991"/>
+        <p14:creationId xmlns="" xmlns:p14="http://schemas.microsoft.com/office/powerpoint/2010/main" val="1024086991"/>
       </p:ext>
     </p:extLst>
   </p:cSld>
@@ -1831,7 +1831,7 @@
     </p:spTree>
     <p:extLst>
       <p:ext uri="{BB962C8B-B14F-4D97-AF65-F5344CB8AC3E}">
-        <p14:creationId xmlns:p14="http://schemas.microsoft.com/office/powerpoint/2010/main" xmlns="" val="1024086991"/>
+        <p14:creationId xmlns="" xmlns:p14="http://schemas.microsoft.com/office/powerpoint/2010/main" val="1024086991"/>
       </p:ext>
     </p:extLst>
   </p:cSld>
@@ -1916,7 +1916,7 @@
     </p:spTree>
     <p:extLst>
       <p:ext uri="{BB962C8B-B14F-4D97-AF65-F5344CB8AC3E}">
-        <p14:creationId xmlns:p14="http://schemas.microsoft.com/office/powerpoint/2010/main" xmlns="" val="1024086991"/>
+        <p14:creationId xmlns="" xmlns:p14="http://schemas.microsoft.com/office/powerpoint/2010/main" val="1024086991"/>
       </p:ext>
     </p:extLst>
   </p:cSld>
@@ -2001,7 +2001,7 @@
     </p:spTree>
     <p:extLst>
       <p:ext uri="{BB962C8B-B14F-4D97-AF65-F5344CB8AC3E}">
-        <p14:creationId xmlns:p14="http://schemas.microsoft.com/office/powerpoint/2010/main" xmlns="" val="1024086991"/>
+        <p14:creationId xmlns="" xmlns:p14="http://schemas.microsoft.com/office/powerpoint/2010/main" val="1024086991"/>
       </p:ext>
     </p:extLst>
   </p:cSld>
@@ -2086,7 +2086,7 @@
     </p:spTree>
     <p:extLst>
       <p:ext uri="{BB962C8B-B14F-4D97-AF65-F5344CB8AC3E}">
-        <p14:creationId xmlns:p14="http://schemas.microsoft.com/office/powerpoint/2010/main" xmlns="" val="1024086991"/>
+        <p14:creationId xmlns="" xmlns:p14="http://schemas.microsoft.com/office/powerpoint/2010/main" val="1024086991"/>
       </p:ext>
     </p:extLst>
   </p:cSld>
@@ -2171,7 +2171,7 @@
     </p:spTree>
     <p:extLst>
       <p:ext uri="{BB962C8B-B14F-4D97-AF65-F5344CB8AC3E}">
-        <p14:creationId xmlns:p14="http://schemas.microsoft.com/office/powerpoint/2010/main" xmlns="" val="1024086991"/>
+        <p14:creationId xmlns="" xmlns:p14="http://schemas.microsoft.com/office/powerpoint/2010/main" val="1024086991"/>
       </p:ext>
     </p:extLst>
   </p:cSld>
@@ -2256,7 +2256,7 @@
     </p:spTree>
     <p:extLst>
       <p:ext uri="{BB962C8B-B14F-4D97-AF65-F5344CB8AC3E}">
-        <p14:creationId xmlns:p14="http://schemas.microsoft.com/office/powerpoint/2010/main" xmlns="" val="1024086991"/>
+        <p14:creationId xmlns="" xmlns:p14="http://schemas.microsoft.com/office/powerpoint/2010/main" val="1024086991"/>
       </p:ext>
     </p:extLst>
   </p:cSld>
@@ -3251,6 +3251,13 @@
   <p:clrMapOvr>
     <a:masterClrMapping/>
   </p:clrMapOvr>
+  <p:timing>
+    <p:tnLst>
+      <p:par>
+        <p:cTn id="1" dur="indefinite" restart="never" nodeType="tmRoot"/>
+      </p:par>
+    </p:tnLst>
+  </p:timing>
 </p:sld>
 </file>
 
@@ -4084,6 +4091,13 @@
   <p:clrMapOvr>
     <a:masterClrMapping/>
   </p:clrMapOvr>
+  <p:timing>
+    <p:tnLst>
+      <p:par>
+        <p:cTn id="1" dur="indefinite" restart="never" nodeType="tmRoot"/>
+      </p:par>
+    </p:tnLst>
+  </p:timing>
 </p:sld>
 </file>
 
@@ -4245,6 +4259,13 @@
   <p:clrMapOvr>
     <a:masterClrMapping/>
   </p:clrMapOvr>
+  <p:timing>
+    <p:tnLst>
+      <p:par>
+        <p:cTn id="1" dur="indefinite" restart="never" nodeType="tmRoot"/>
+      </p:par>
+    </p:tnLst>
+  </p:timing>
 </p:sld>
 </file>
 
@@ -5133,6 +5154,13 @@
   <p:clrMapOvr>
     <a:masterClrMapping/>
   </p:clrMapOvr>
+  <p:timing>
+    <p:tnLst>
+      <p:par>
+        <p:cTn id="1" dur="indefinite" restart="never" nodeType="tmRoot"/>
+      </p:par>
+    </p:tnLst>
+  </p:timing>
 </p:sld>
 </file>
 
@@ -5232,7 +5260,7 @@
           <p:nvPr>
             <p:extLst>
               <p:ext uri="{D42A27DB-BD31-4B8C-83A1-F6EECF244321}">
-                <p14:modId xmlns:p14="http://schemas.microsoft.com/office/powerpoint/2010/main" xmlns="" val="1579011935"/>
+                <p14:modId xmlns="" xmlns:p14="http://schemas.microsoft.com/office/powerpoint/2010/main" val="1579011935"/>
               </p:ext>
             </p:extLst>
           </p:nvPr>
@@ -5249,28 +5277,28 @@
                 <a:gridCol w="1097280">
                   <a:extLst>
                     <a:ext uri="{9D8B030D-6E8A-4147-A177-3AD203B41FA5}">
-                      <a16:colId xmlns:a16="http://schemas.microsoft.com/office/drawing/2014/main" xmlns="" val="20000"/>
+                      <a16:colId xmlns="" xmlns:a16="http://schemas.microsoft.com/office/drawing/2014/main" val="20000"/>
                     </a:ext>
                   </a:extLst>
                 </a:gridCol>
                 <a:gridCol w="2258568">
                   <a:extLst>
                     <a:ext uri="{9D8B030D-6E8A-4147-A177-3AD203B41FA5}">
-                      <a16:colId xmlns:a16="http://schemas.microsoft.com/office/drawing/2014/main" xmlns="" val="20001"/>
+                      <a16:colId xmlns="" xmlns:a16="http://schemas.microsoft.com/office/drawing/2014/main" val="20001"/>
                     </a:ext>
                   </a:extLst>
                 </a:gridCol>
                 <a:gridCol w="2258568">
                   <a:extLst>
                     <a:ext uri="{9D8B030D-6E8A-4147-A177-3AD203B41FA5}">
-                      <a16:colId xmlns:a16="http://schemas.microsoft.com/office/drawing/2014/main" xmlns="" val="20002"/>
+                      <a16:colId xmlns="" xmlns:a16="http://schemas.microsoft.com/office/drawing/2014/main" val="20002"/>
                     </a:ext>
                   </a:extLst>
                 </a:gridCol>
                 <a:gridCol w="2258568">
                   <a:extLst>
                     <a:ext uri="{9D8B030D-6E8A-4147-A177-3AD203B41FA5}">
-                      <a16:colId xmlns:a16="http://schemas.microsoft.com/office/drawing/2014/main" xmlns="" val="20003"/>
+                      <a16:colId xmlns="" xmlns:a16="http://schemas.microsoft.com/office/drawing/2014/main" val="20003"/>
                     </a:ext>
                   </a:extLst>
                 </a:gridCol>
@@ -5550,7 +5578,7 @@
                 </a:tc>
                 <a:extLst>
                   <a:ext uri="{0D108BD9-81ED-4DB2-BD59-A6C34878D82A}">
-                    <a16:rowId xmlns:a16="http://schemas.microsoft.com/office/drawing/2014/main" xmlns="" val="10000"/>
+                    <a16:rowId xmlns="" xmlns:a16="http://schemas.microsoft.com/office/drawing/2014/main" val="10000"/>
                   </a:ext>
                 </a:extLst>
               </a:tr>
@@ -5829,7 +5857,7 @@
                 </a:tc>
                 <a:extLst>
                   <a:ext uri="{0D108BD9-81ED-4DB2-BD59-A6C34878D82A}">
-                    <a16:rowId xmlns:a16="http://schemas.microsoft.com/office/drawing/2014/main" xmlns="" val="10001"/>
+                    <a16:rowId xmlns="" xmlns:a16="http://schemas.microsoft.com/office/drawing/2014/main" val="10001"/>
                   </a:ext>
                 </a:extLst>
               </a:tr>
@@ -6108,7 +6136,7 @@
                 </a:tc>
                 <a:extLst>
                   <a:ext uri="{0D108BD9-81ED-4DB2-BD59-A6C34878D82A}">
-                    <a16:rowId xmlns:a16="http://schemas.microsoft.com/office/drawing/2014/main" xmlns="" val="10002"/>
+                    <a16:rowId xmlns="" xmlns:a16="http://schemas.microsoft.com/office/drawing/2014/main" val="10002"/>
                   </a:ext>
                 </a:extLst>
               </a:tr>
@@ -6387,7 +6415,7 @@
                 </a:tc>
                 <a:extLst>
                   <a:ext uri="{0D108BD9-81ED-4DB2-BD59-A6C34878D82A}">
-                    <a16:rowId xmlns:a16="http://schemas.microsoft.com/office/drawing/2014/main" xmlns="" val="10003"/>
+                    <a16:rowId xmlns="" xmlns:a16="http://schemas.microsoft.com/office/drawing/2014/main" val="10003"/>
                   </a:ext>
                 </a:extLst>
               </a:tr>
@@ -6666,7 +6694,7 @@
                 </a:tc>
                 <a:extLst>
                   <a:ext uri="{0D108BD9-81ED-4DB2-BD59-A6C34878D82A}">
-                    <a16:rowId xmlns:a16="http://schemas.microsoft.com/office/drawing/2014/main" xmlns="" val="10004"/>
+                    <a16:rowId xmlns="" xmlns:a16="http://schemas.microsoft.com/office/drawing/2014/main" val="10004"/>
                   </a:ext>
                 </a:extLst>
               </a:tr>
@@ -6945,7 +6973,7 @@
                 </a:tc>
                 <a:extLst>
                   <a:ext uri="{0D108BD9-81ED-4DB2-BD59-A6C34878D82A}">
-                    <a16:rowId xmlns:a16="http://schemas.microsoft.com/office/drawing/2014/main" xmlns="" val="10005"/>
+                    <a16:rowId xmlns="" xmlns:a16="http://schemas.microsoft.com/office/drawing/2014/main" val="10005"/>
                   </a:ext>
                 </a:extLst>
               </a:tr>
@@ -7224,7 +7252,7 @@
                 </a:tc>
                 <a:extLst>
                   <a:ext uri="{0D108BD9-81ED-4DB2-BD59-A6C34878D82A}">
-                    <a16:rowId xmlns:a16="http://schemas.microsoft.com/office/drawing/2014/main" xmlns="" val="10006"/>
+                    <a16:rowId xmlns="" xmlns:a16="http://schemas.microsoft.com/office/drawing/2014/main" val="10006"/>
                   </a:ext>
                 </a:extLst>
               </a:tr>
@@ -7503,7 +7531,7 @@
                 </a:tc>
                 <a:extLst>
                   <a:ext uri="{0D108BD9-81ED-4DB2-BD59-A6C34878D82A}">
-                    <a16:rowId xmlns:a16="http://schemas.microsoft.com/office/drawing/2014/main" xmlns="" val="10007"/>
+                    <a16:rowId xmlns="" xmlns:a16="http://schemas.microsoft.com/office/drawing/2014/main" val="10007"/>
                   </a:ext>
                 </a:extLst>
               </a:tr>
@@ -7782,7 +7810,7 @@
                 </a:tc>
                 <a:extLst>
                   <a:ext uri="{0D108BD9-81ED-4DB2-BD59-A6C34878D82A}">
-                    <a16:rowId xmlns:a16="http://schemas.microsoft.com/office/drawing/2014/main" xmlns="" val="10008"/>
+                    <a16:rowId xmlns="" xmlns:a16="http://schemas.microsoft.com/office/drawing/2014/main" val="10008"/>
                   </a:ext>
                 </a:extLst>
               </a:tr>
@@ -8061,7 +8089,7 @@
                 </a:tc>
                 <a:extLst>
                   <a:ext uri="{0D108BD9-81ED-4DB2-BD59-A6C34878D82A}">
-                    <a16:rowId xmlns:a16="http://schemas.microsoft.com/office/drawing/2014/main" xmlns="" val="10009"/>
+                    <a16:rowId xmlns="" xmlns:a16="http://schemas.microsoft.com/office/drawing/2014/main" val="10009"/>
                   </a:ext>
                 </a:extLst>
               </a:tr>
@@ -8340,7 +8368,7 @@
                 </a:tc>
                 <a:extLst>
                   <a:ext uri="{0D108BD9-81ED-4DB2-BD59-A6C34878D82A}">
-                    <a16:rowId xmlns:a16="http://schemas.microsoft.com/office/drawing/2014/main" xmlns="" val="10010"/>
+                    <a16:rowId xmlns="" xmlns:a16="http://schemas.microsoft.com/office/drawing/2014/main" val="10010"/>
                   </a:ext>
                 </a:extLst>
               </a:tr>
@@ -8353,6 +8381,13 @@
   <p:clrMapOvr>
     <a:masterClrMapping/>
   </p:clrMapOvr>
+  <p:timing>
+    <p:tnLst>
+      <p:par>
+        <p:cTn id="1" dur="indefinite" restart="never" nodeType="tmRoot"/>
+      </p:par>
+    </p:tnLst>
+  </p:timing>
 </p:sld>
 </file>
 
@@ -8928,6 +8963,13 @@
   <p:clrMapOvr>
     <a:masterClrMapping/>
   </p:clrMapOvr>
+  <p:timing>
+    <p:tnLst>
+      <p:par>
+        <p:cTn id="1" dur="indefinite" restart="never" nodeType="tmRoot"/>
+      </p:par>
+    </p:tnLst>
+  </p:timing>
 </p:sld>
 </file>
 
@@ -9665,6 +9707,13 @@
   <p:clrMapOvr>
     <a:masterClrMapping/>
   </p:clrMapOvr>
+  <p:timing>
+    <p:tnLst>
+      <p:par>
+        <p:cTn id="1" dur="indefinite" restart="never" nodeType="tmRoot"/>
+      </p:par>
+    </p:tnLst>
+  </p:timing>
 </p:sld>
 </file>
 
@@ -9921,6 +9970,13 @@
   <p:clrMapOvr>
     <a:masterClrMapping/>
   </p:clrMapOvr>
+  <p:timing>
+    <p:tnLst>
+      <p:par>
+        <p:cTn id="1" dur="indefinite" restart="never" nodeType="tmRoot"/>
+      </p:par>
+    </p:tnLst>
+  </p:timing>
 </p:sld>
 </file>
 
@@ -10173,6 +10229,13 @@
   <p:clrMapOvr>
     <a:masterClrMapping/>
   </p:clrMapOvr>
+  <p:timing>
+    <p:tnLst>
+      <p:par>
+        <p:cTn id="1" dur="indefinite" restart="never" nodeType="tmRoot"/>
+      </p:par>
+    </p:tnLst>
+  </p:timing>
 </p:sld>
 </file>
 
@@ -12542,7 +12605,7 @@
               <a:buNone/>
             </a:pPr>
             <a:r>
-              <a:rPr lang="en-US" sz="1200" dirty="0">
+              <a:rPr lang="en-US" sz="1200" dirty="0" err="1">
                 <a:solidFill>
                   <a:srgbClr val="B0BEC5"/>
                 </a:solidFill>
@@ -12550,7 +12613,51 @@
                 <a:ea typeface="Calibri" pitchFamily="34" charset="-122"/>
                 <a:cs typeface="Times New Roman"/>
               </a:rPr>
-              <a:t>Kênh LoS độ lợi cao tạo nhiễu đồng kênh nghiêm trọng giữa UAV-BS và trạm mặt đất</a:t>
+              <a:t>Kênh</a:t>
+            </a:r>
+            <a:r>
+              <a:rPr lang="en-US" sz="1200" dirty="0">
+                <a:solidFill>
+                  <a:srgbClr val="B0BEC5"/>
+                </a:solidFill>
+                <a:latin typeface="Times New Roman"/>
+                <a:ea typeface="Calibri" pitchFamily="34" charset="-122"/>
+                <a:cs typeface="Times New Roman"/>
+              </a:rPr>
+              <a:t> </a:t>
+            </a:r>
+            <a:r>
+              <a:rPr lang="en-US" sz="1200" dirty="0" err="1" smtClean="0">
+                <a:solidFill>
+                  <a:srgbClr val="B0BEC5"/>
+                </a:solidFill>
+                <a:latin typeface="Times New Roman"/>
+                <a:ea typeface="Calibri" pitchFamily="34" charset="-122"/>
+                <a:cs typeface="Times New Roman"/>
+              </a:rPr>
+              <a:t>LoS</a:t>
+            </a:r>
+            <a:r>
+              <a:rPr lang="en-US" sz="1200" dirty="0" smtClean="0">
+                <a:solidFill>
+                  <a:srgbClr val="B0BEC5"/>
+                </a:solidFill>
+                <a:latin typeface="Times New Roman"/>
+                <a:ea typeface="Calibri" pitchFamily="34" charset="-122"/>
+                <a:cs typeface="Times New Roman"/>
+              </a:rPr>
+              <a:t> </a:t>
+            </a:r>
+            <a:r>
+              <a:rPr lang="en-US" sz="1200" dirty="0">
+                <a:solidFill>
+                  <a:srgbClr val="B0BEC5"/>
+                </a:solidFill>
+                <a:latin typeface="Times New Roman"/>
+                <a:ea typeface="Calibri" pitchFamily="34" charset="-122"/>
+                <a:cs typeface="Times New Roman"/>
+              </a:rPr>
+              <a:t>độ lợi cao tạo nhiễu đồng kênh nghiêm trọng giữa UAV-BS và trạm mặt đất</a:t>
             </a:r>
             <a:endParaRPr lang="en-US" sz="1200" dirty="0">
               <a:latin typeface="Times New Roman"/>
@@ -15688,7 +15795,7 @@
   <a:extraClrSchemeLst/>
   <a:extLst>
     <a:ext uri="{05A4C25C-085E-4340-85A3-A5531E510DB2}">
-      <thm15:themeFamily xmlns:thm15="http://schemas.microsoft.com/office/thememl/2012/main" xmlns="" name="Office Theme" id="{62F939B6-93AF-4DB8-9C6B-D6C7DFDC589F}" vid="{4A3C46E8-61CC-4603-A589-7422A47A8E4A}"/>
+      <thm15:themeFamily xmlns="" xmlns:thm15="http://schemas.microsoft.com/office/thememl/2012/main" name="Office Theme" id="{62F939B6-93AF-4DB8-9C6B-D6C7DFDC589F}" vid="{4A3C46E8-61CC-4603-A589-7422A47A8E4A}"/>
     </a:ext>
   </a:extLst>
 </a:theme>
@@ -15983,7 +16090,7 @@
   <a:extraClrSchemeLst/>
   <a:extLst>
     <a:ext uri="{05A4C25C-085E-4340-85A3-A5531E510DB2}">
-      <thm15:themeFamily xmlns:thm15="http://schemas.microsoft.com/office/thememl/2012/main" xmlns="" name="Office Theme" id="{62F939B6-93AF-4DB8-9C6B-D6C7DFDC589F}" vid="{4A3C46E8-61CC-4603-A589-7422A47A8E4A}"/>
+      <thm15:themeFamily xmlns="" xmlns:thm15="http://schemas.microsoft.com/office/thememl/2012/main" name="Office Theme" id="{62F939B6-93AF-4DB8-9C6B-D6C7DFDC589F}" vid="{4A3C46E8-61CC-4603-A589-7422A47A8E4A}"/>
     </a:ext>
   </a:extLst>
 </a:theme>
